--- a/TTL/AND GATE/AND TTL.pptx
+++ b/TTL/AND GATE/AND TTL.pptx
@@ -13,6 +13,7 @@
     <p:sldId id="283" r:id="rId7"/>
     <p:sldId id="284" r:id="rId8"/>
     <p:sldId id="285" r:id="rId9"/>
+    <p:sldId id="286" r:id="rId10"/>
   </p:sldIdLst>
   <p:sldSz cx="12192000" cy="6858000"/>
   <p:notesSz cx="6858000" cy="9144000"/>
@@ -277,7 +278,7 @@
           <a:p>
             <a:fld id="{9DE8CA85-7BB6-4B21-A51D-F313EE88DF87}" type="datetimeFigureOut">
               <a:rPr lang="en-US" smtClean="0"/>
-              <a:t>3/17/2025</a:t>
+              <a:t>5/30/2025</a:t>
             </a:fld>
             <a:endParaRPr lang="en-US"/>
           </a:p>
@@ -475,7 +476,7 @@
           <a:p>
             <a:fld id="{9DE8CA85-7BB6-4B21-A51D-F313EE88DF87}" type="datetimeFigureOut">
               <a:rPr lang="en-US" smtClean="0"/>
-              <a:t>3/17/2025</a:t>
+              <a:t>5/30/2025</a:t>
             </a:fld>
             <a:endParaRPr lang="en-US"/>
           </a:p>
@@ -683,7 +684,7 @@
           <a:p>
             <a:fld id="{9DE8CA85-7BB6-4B21-A51D-F313EE88DF87}" type="datetimeFigureOut">
               <a:rPr lang="en-US" smtClean="0"/>
-              <a:t>3/17/2025</a:t>
+              <a:t>5/30/2025</a:t>
             </a:fld>
             <a:endParaRPr lang="en-US"/>
           </a:p>
@@ -881,7 +882,7 @@
           <a:p>
             <a:fld id="{9DE8CA85-7BB6-4B21-A51D-F313EE88DF87}" type="datetimeFigureOut">
               <a:rPr lang="en-US" smtClean="0"/>
-              <a:t>3/17/2025</a:t>
+              <a:t>5/30/2025</a:t>
             </a:fld>
             <a:endParaRPr lang="en-US"/>
           </a:p>
@@ -1156,7 +1157,7 @@
           <a:p>
             <a:fld id="{9DE8CA85-7BB6-4B21-A51D-F313EE88DF87}" type="datetimeFigureOut">
               <a:rPr lang="en-US" smtClean="0"/>
-              <a:t>3/17/2025</a:t>
+              <a:t>5/30/2025</a:t>
             </a:fld>
             <a:endParaRPr lang="en-US"/>
           </a:p>
@@ -1421,7 +1422,7 @@
           <a:p>
             <a:fld id="{9DE8CA85-7BB6-4B21-A51D-F313EE88DF87}" type="datetimeFigureOut">
               <a:rPr lang="en-US" smtClean="0"/>
-              <a:t>3/17/2025</a:t>
+              <a:t>5/30/2025</a:t>
             </a:fld>
             <a:endParaRPr lang="en-US"/>
           </a:p>
@@ -1833,7 +1834,7 @@
           <a:p>
             <a:fld id="{9DE8CA85-7BB6-4B21-A51D-F313EE88DF87}" type="datetimeFigureOut">
               <a:rPr lang="en-US" smtClean="0"/>
-              <a:t>3/17/2025</a:t>
+              <a:t>5/30/2025</a:t>
             </a:fld>
             <a:endParaRPr lang="en-US"/>
           </a:p>
@@ -1974,7 +1975,7 @@
           <a:p>
             <a:fld id="{9DE8CA85-7BB6-4B21-A51D-F313EE88DF87}" type="datetimeFigureOut">
               <a:rPr lang="en-US" smtClean="0"/>
-              <a:t>3/17/2025</a:t>
+              <a:t>5/30/2025</a:t>
             </a:fld>
             <a:endParaRPr lang="en-US"/>
           </a:p>
@@ -2087,7 +2088,7 @@
           <a:p>
             <a:fld id="{9DE8CA85-7BB6-4B21-A51D-F313EE88DF87}" type="datetimeFigureOut">
               <a:rPr lang="en-US" smtClean="0"/>
-              <a:t>3/17/2025</a:t>
+              <a:t>5/30/2025</a:t>
             </a:fld>
             <a:endParaRPr lang="en-US"/>
           </a:p>
@@ -2398,7 +2399,7 @@
           <a:p>
             <a:fld id="{9DE8CA85-7BB6-4B21-A51D-F313EE88DF87}" type="datetimeFigureOut">
               <a:rPr lang="en-US" smtClean="0"/>
-              <a:t>3/17/2025</a:t>
+              <a:t>5/30/2025</a:t>
             </a:fld>
             <a:endParaRPr lang="en-US"/>
           </a:p>
@@ -2686,7 +2687,7 @@
           <a:p>
             <a:fld id="{9DE8CA85-7BB6-4B21-A51D-F313EE88DF87}" type="datetimeFigureOut">
               <a:rPr lang="en-US" smtClean="0"/>
-              <a:t>3/17/2025</a:t>
+              <a:t>5/30/2025</a:t>
             </a:fld>
             <a:endParaRPr lang="en-US"/>
           </a:p>
@@ -2927,7 +2928,7 @@
           <a:p>
             <a:fld id="{9DE8CA85-7BB6-4B21-A51D-F313EE88DF87}" type="datetimeFigureOut">
               <a:rPr lang="en-US" smtClean="0"/>
-              <a:t>3/17/2025</a:t>
+              <a:t>5/30/2025</a:t>
             </a:fld>
             <a:endParaRPr lang="en-US"/>
           </a:p>
@@ -4025,13 +4026,13 @@
   <p:clrMapOvr>
     <a:masterClrMapping/>
   </p:clrMapOvr>
-  <mc:AlternateContent xmlns:mc="http://schemas.openxmlformats.org/markup-compatibility/2006">
-    <mc:Choice xmlns:p14="http://schemas.microsoft.com/office/powerpoint/2010/main" Requires="p14">
+  <mc:AlternateContent xmlns:mc="http://schemas.openxmlformats.org/markup-compatibility/2006" xmlns:p14="http://schemas.microsoft.com/office/powerpoint/2010/main">
+    <mc:Choice Requires="p14">
       <p:transition spd="med" p14:dur="700">
         <p:fade/>
       </p:transition>
     </mc:Choice>
-    <mc:Fallback>
+    <mc:Fallback xmlns="">
       <p:transition spd="med">
         <p:fade/>
       </p:transition>
@@ -6113,46 +6114,6 @@
       </p:sp>
       <p:sp>
         <p:nvSpPr>
-          <p:cNvPr id="25" name="TextBox 24">
-            <a:extLst>
-              <a:ext uri="{FF2B5EF4-FFF2-40B4-BE49-F238E27FC236}">
-                <a16:creationId xmlns:a16="http://schemas.microsoft.com/office/drawing/2014/main" id="{22CC96D2-A05A-930C-8A2B-CF4AF93D7F91}"/>
-              </a:ext>
-            </a:extLst>
-          </p:cNvPr>
-          <p:cNvSpPr txBox="1"/>
-          <p:nvPr/>
-        </p:nvSpPr>
-        <p:spPr>
-          <a:xfrm>
-            <a:off x="9115008" y="4555555"/>
-            <a:ext cx="505267" cy="338554"/>
-          </a:xfrm>
-          <a:prstGeom prst="rect">
-            <a:avLst/>
-          </a:prstGeom>
-          <a:noFill/>
-        </p:spPr>
-        <p:txBody>
-          <a:bodyPr wrap="none" rtlCol="0">
-            <a:spAutoFit/>
-          </a:bodyPr>
-          <a:lstStyle/>
-          <a:p>
-            <a:r>
-              <a:rPr lang="en-US" sz="1600" dirty="0">
-                <a:solidFill>
-                  <a:srgbClr val="2985FD"/>
-                </a:solidFill>
-                <a:latin typeface="Berlin Sans FB" panose="020E0602020502020306" pitchFamily="34" charset="0"/>
-              </a:rPr>
-              <a:t>220</a:t>
-            </a:r>
-          </a:p>
-        </p:txBody>
-      </p:sp>
-      <p:sp>
-        <p:nvSpPr>
           <p:cNvPr id="27" name="TextBox 26">
             <a:extLst>
               <a:ext uri="{FF2B5EF4-FFF2-40B4-BE49-F238E27FC236}">
@@ -6268,6 +6229,116 @@
           </a:p>
         </p:txBody>
       </p:sp>
+      <mc:AlternateContent xmlns:mc="http://schemas.openxmlformats.org/markup-compatibility/2006" xmlns:a14="http://schemas.microsoft.com/office/drawing/2010/main">
+        <mc:Choice Requires="a14">
+          <p:sp>
+            <p:nvSpPr>
+              <p:cNvPr id="4" name="TextBox 3">
+                <a:extLst>
+                  <a:ext uri="{FF2B5EF4-FFF2-40B4-BE49-F238E27FC236}">
+                    <a16:creationId xmlns:a16="http://schemas.microsoft.com/office/drawing/2014/main" id="{DF1E5180-FA08-BDD7-150C-529E423F60D3}"/>
+                  </a:ext>
+                </a:extLst>
+              </p:cNvPr>
+              <p:cNvSpPr txBox="1"/>
+              <p:nvPr/>
+            </p:nvSpPr>
+            <p:spPr>
+              <a:xfrm>
+                <a:off x="9115008" y="4555555"/>
+                <a:ext cx="668581" cy="369332"/>
+              </a:xfrm>
+              <a:prstGeom prst="rect">
+                <a:avLst/>
+              </a:prstGeom>
+              <a:noFill/>
+            </p:spPr>
+            <p:txBody>
+              <a:bodyPr wrap="none" rtlCol="0">
+                <a:spAutoFit/>
+              </a:bodyPr>
+              <a:lstStyle/>
+              <a:p>
+                <a:r>
+                  <a:rPr lang="en-US" sz="1600" dirty="0">
+                    <a:solidFill>
+                      <a:srgbClr val="0070C0"/>
+                    </a:solidFill>
+                    <a:latin typeface="Berlin Sans FB" panose="020E0602020502020306" pitchFamily="34" charset="0"/>
+                  </a:rPr>
+                  <a:t>220</a:t>
+                </a:r>
+                <a14:m>
+                  <m:oMath xmlns:m="http://schemas.openxmlformats.org/officeDocument/2006/math">
+                    <m:r>
+                      <a:rPr lang="en-US" sz="1800" i="1" smtClean="0">
+                        <a:solidFill>
+                          <a:srgbClr val="0070C0"/>
+                        </a:solidFill>
+                        <a:effectLst/>
+                        <a:latin typeface="Cambria Math" panose="02040503050406030204" pitchFamily="18" charset="0"/>
+                        <a:ea typeface="Calibri" panose="020F0502020204030204" pitchFamily="34" charset="0"/>
+                        <a:cs typeface="Times New Roman" panose="02020603050405020304" pitchFamily="18" charset="0"/>
+                      </a:rPr>
+                      <m:t>𝛺</m:t>
+                    </m:r>
+                  </m:oMath>
+                </a14:m>
+                <a:endParaRPr lang="en-US" sz="1600" dirty="0">
+                  <a:solidFill>
+                    <a:srgbClr val="0070C0"/>
+                  </a:solidFill>
+                  <a:latin typeface="Berlin Sans FB" panose="020E0602020502020306" pitchFamily="34" charset="0"/>
+                </a:endParaRPr>
+              </a:p>
+            </p:txBody>
+          </p:sp>
+        </mc:Choice>
+        <mc:Fallback xmlns="">
+          <p:sp>
+            <p:nvSpPr>
+              <p:cNvPr id="4" name="TextBox 3">
+                <a:extLst>
+                  <a:ext uri="{FF2B5EF4-FFF2-40B4-BE49-F238E27FC236}">
+                    <a16:creationId xmlns:a16="http://schemas.microsoft.com/office/drawing/2014/main" id="{DF1E5180-FA08-BDD7-150C-529E423F60D3}"/>
+                  </a:ext>
+                </a:extLst>
+              </p:cNvPr>
+              <p:cNvSpPr txBox="1">
+                <a:spLocks noRot="1" noChangeAspect="1" noMove="1" noResize="1" noEditPoints="1" noAdjustHandles="1" noChangeArrowheads="1" noChangeShapeType="1" noTextEdit="1"/>
+              </p:cNvSpPr>
+              <p:nvPr/>
+            </p:nvSpPr>
+            <p:spPr>
+              <a:xfrm>
+                <a:off x="9115008" y="4555555"/>
+                <a:ext cx="668581" cy="369332"/>
+              </a:xfrm>
+              <a:prstGeom prst="rect">
+                <a:avLst/>
+              </a:prstGeom>
+              <a:blipFill>
+                <a:blip r:embed="rId8"/>
+                <a:stretch>
+                  <a:fillRect l="-4545" b="-19672"/>
+                </a:stretch>
+              </a:blipFill>
+            </p:spPr>
+            <p:txBody>
+              <a:bodyPr/>
+              <a:lstStyle/>
+              <a:p>
+                <a:r>
+                  <a:rPr lang="en-US">
+                    <a:noFill/>
+                  </a:rPr>
+                  <a:t> </a:t>
+                </a:r>
+              </a:p>
+            </p:txBody>
+          </p:sp>
+        </mc:Fallback>
+      </mc:AlternateContent>
     </p:spTree>
     <p:extLst>
       <p:ext uri="{BB962C8B-B14F-4D97-AF65-F5344CB8AC3E}">
@@ -8355,46 +8426,116 @@
           </a:p>
         </p:txBody>
       </p:sp>
-      <p:sp>
-        <p:nvSpPr>
-          <p:cNvPr id="25" name="TextBox 24">
-            <a:extLst>
-              <a:ext uri="{FF2B5EF4-FFF2-40B4-BE49-F238E27FC236}">
-                <a16:creationId xmlns:a16="http://schemas.microsoft.com/office/drawing/2014/main" id="{E9D03C7B-A322-0514-0A05-12790586D5F4}"/>
-              </a:ext>
-            </a:extLst>
-          </p:cNvPr>
-          <p:cNvSpPr txBox="1"/>
-          <p:nvPr/>
-        </p:nvSpPr>
-        <p:spPr>
-          <a:xfrm>
-            <a:off x="9115008" y="4555555"/>
-            <a:ext cx="505267" cy="338554"/>
-          </a:xfrm>
-          <a:prstGeom prst="rect">
-            <a:avLst/>
-          </a:prstGeom>
-          <a:noFill/>
-        </p:spPr>
-        <p:txBody>
-          <a:bodyPr wrap="none" rtlCol="0">
-            <a:spAutoFit/>
-          </a:bodyPr>
-          <a:lstStyle/>
-          <a:p>
-            <a:r>
-              <a:rPr lang="en-US" sz="1600" dirty="0">
-                <a:solidFill>
-                  <a:srgbClr val="2985FD"/>
-                </a:solidFill>
-                <a:latin typeface="Berlin Sans FB" panose="020E0602020502020306" pitchFamily="34" charset="0"/>
-              </a:rPr>
-              <a:t>220</a:t>
-            </a:r>
-          </a:p>
-        </p:txBody>
-      </p:sp>
+      <mc:AlternateContent xmlns:mc="http://schemas.openxmlformats.org/markup-compatibility/2006" xmlns:a14="http://schemas.microsoft.com/office/drawing/2010/main">
+        <mc:Choice Requires="a14">
+          <p:sp>
+            <p:nvSpPr>
+              <p:cNvPr id="25" name="TextBox 24">
+                <a:extLst>
+                  <a:ext uri="{FF2B5EF4-FFF2-40B4-BE49-F238E27FC236}">
+                    <a16:creationId xmlns:a16="http://schemas.microsoft.com/office/drawing/2014/main" id="{E9D03C7B-A322-0514-0A05-12790586D5F4}"/>
+                  </a:ext>
+                </a:extLst>
+              </p:cNvPr>
+              <p:cNvSpPr txBox="1"/>
+              <p:nvPr/>
+            </p:nvSpPr>
+            <p:spPr>
+              <a:xfrm>
+                <a:off x="9115008" y="4555555"/>
+                <a:ext cx="668581" cy="369332"/>
+              </a:xfrm>
+              <a:prstGeom prst="rect">
+                <a:avLst/>
+              </a:prstGeom>
+              <a:noFill/>
+            </p:spPr>
+            <p:txBody>
+              <a:bodyPr wrap="none" rtlCol="0">
+                <a:spAutoFit/>
+              </a:bodyPr>
+              <a:lstStyle/>
+              <a:p>
+                <a:r>
+                  <a:rPr lang="en-US" sz="1600" dirty="0">
+                    <a:solidFill>
+                      <a:srgbClr val="0070C0"/>
+                    </a:solidFill>
+                    <a:latin typeface="Berlin Sans FB" panose="020E0602020502020306" pitchFamily="34" charset="0"/>
+                  </a:rPr>
+                  <a:t>220</a:t>
+                </a:r>
+                <a14:m>
+                  <m:oMath xmlns:m="http://schemas.openxmlformats.org/officeDocument/2006/math">
+                    <m:r>
+                      <a:rPr lang="en-US" sz="1800" i="1" smtClean="0">
+                        <a:solidFill>
+                          <a:srgbClr val="0070C0"/>
+                        </a:solidFill>
+                        <a:effectLst/>
+                        <a:latin typeface="Cambria Math" panose="02040503050406030204" pitchFamily="18" charset="0"/>
+                        <a:ea typeface="Calibri" panose="020F0502020204030204" pitchFamily="34" charset="0"/>
+                        <a:cs typeface="Times New Roman" panose="02020603050405020304" pitchFamily="18" charset="0"/>
+                      </a:rPr>
+                      <m:t>𝛺</m:t>
+                    </m:r>
+                  </m:oMath>
+                </a14:m>
+                <a:endParaRPr lang="en-US" sz="1600" dirty="0">
+                  <a:solidFill>
+                    <a:srgbClr val="0070C0"/>
+                  </a:solidFill>
+                  <a:latin typeface="Berlin Sans FB" panose="020E0602020502020306" pitchFamily="34" charset="0"/>
+                </a:endParaRPr>
+              </a:p>
+            </p:txBody>
+          </p:sp>
+        </mc:Choice>
+        <mc:Fallback xmlns="">
+          <p:sp>
+            <p:nvSpPr>
+              <p:cNvPr id="25" name="TextBox 24">
+                <a:extLst>
+                  <a:ext uri="{FF2B5EF4-FFF2-40B4-BE49-F238E27FC236}">
+                    <a16:creationId xmlns:a16="http://schemas.microsoft.com/office/drawing/2014/main" id="{E9D03C7B-A322-0514-0A05-12790586D5F4}"/>
+                  </a:ext>
+                </a:extLst>
+              </p:cNvPr>
+              <p:cNvSpPr txBox="1">
+                <a:spLocks noRot="1" noChangeAspect="1" noMove="1" noResize="1" noEditPoints="1" noAdjustHandles="1" noChangeArrowheads="1" noChangeShapeType="1" noTextEdit="1"/>
+              </p:cNvSpPr>
+              <p:nvPr/>
+            </p:nvSpPr>
+            <p:spPr>
+              <a:xfrm>
+                <a:off x="9115008" y="4555555"/>
+                <a:ext cx="668581" cy="369332"/>
+              </a:xfrm>
+              <a:prstGeom prst="rect">
+                <a:avLst/>
+              </a:prstGeom>
+              <a:blipFill>
+                <a:blip r:embed="rId8"/>
+                <a:stretch>
+                  <a:fillRect l="-4545" b="-19672"/>
+                </a:stretch>
+              </a:blipFill>
+            </p:spPr>
+            <p:txBody>
+              <a:bodyPr/>
+              <a:lstStyle/>
+              <a:p>
+                <a:r>
+                  <a:rPr lang="en-US">
+                    <a:noFill/>
+                  </a:rPr>
+                  <a:t> </a:t>
+                </a:r>
+              </a:p>
+            </p:txBody>
+          </p:sp>
+        </mc:Fallback>
+      </mc:AlternateContent>
       <p:sp>
         <p:nvSpPr>
           <p:cNvPr id="27" name="TextBox 26">
@@ -8906,13 +9047,13 @@
   <p:clrMapOvr>
     <a:masterClrMapping/>
   </p:clrMapOvr>
-  <mc:AlternateContent xmlns:mc="http://schemas.openxmlformats.org/markup-compatibility/2006">
-    <mc:Choice xmlns:p159="http://schemas.microsoft.com/office/powerpoint/2015/09/main" Requires="p159">
+  <mc:AlternateContent xmlns:mc="http://schemas.openxmlformats.org/markup-compatibility/2006" xmlns:p159="http://schemas.microsoft.com/office/powerpoint/2015/09/main">
+    <mc:Choice Requires="p159">
       <p:transition xmlns:p14="http://schemas.microsoft.com/office/powerpoint/2010/main" spd="slow" p14:dur="2000">
         <p159:morph option="byObject"/>
       </p:transition>
     </mc:Choice>
-    <mc:Fallback>
+    <mc:Fallback xmlns="">
       <p:transition spd="slow">
         <p:fade/>
       </p:transition>
@@ -11074,46 +11215,6 @@
                 <a:latin typeface="Berlin Sans FB" panose="020E0602020502020306" pitchFamily="34" charset="0"/>
               </a:rPr>
               <a:t>1k</a:t>
-            </a:r>
-          </a:p>
-        </p:txBody>
-      </p:sp>
-      <p:sp>
-        <p:nvSpPr>
-          <p:cNvPr id="25" name="TextBox 24">
-            <a:extLst>
-              <a:ext uri="{FF2B5EF4-FFF2-40B4-BE49-F238E27FC236}">
-                <a16:creationId xmlns:a16="http://schemas.microsoft.com/office/drawing/2014/main" id="{8C56C518-8A33-DC6B-AB81-2E773109FEFE}"/>
-              </a:ext>
-            </a:extLst>
-          </p:cNvPr>
-          <p:cNvSpPr txBox="1"/>
-          <p:nvPr/>
-        </p:nvSpPr>
-        <p:spPr>
-          <a:xfrm>
-            <a:off x="9115008" y="4555555"/>
-            <a:ext cx="505267" cy="338554"/>
-          </a:xfrm>
-          <a:prstGeom prst="rect">
-            <a:avLst/>
-          </a:prstGeom>
-          <a:noFill/>
-        </p:spPr>
-        <p:txBody>
-          <a:bodyPr wrap="none" rtlCol="0">
-            <a:spAutoFit/>
-          </a:bodyPr>
-          <a:lstStyle/>
-          <a:p>
-            <a:r>
-              <a:rPr lang="en-US" sz="1600" dirty="0">
-                <a:solidFill>
-                  <a:srgbClr val="2985FD"/>
-                </a:solidFill>
-                <a:latin typeface="Berlin Sans FB" panose="020E0602020502020306" pitchFamily="34" charset="0"/>
-              </a:rPr>
-              <a:t>220</a:t>
             </a:r>
           </a:p>
         </p:txBody>
@@ -11564,6 +11665,116 @@
           </a:graphicData>
         </a:graphic>
       </p:graphicFrame>
+      <mc:AlternateContent xmlns:mc="http://schemas.openxmlformats.org/markup-compatibility/2006" xmlns:a14="http://schemas.microsoft.com/office/drawing/2010/main">
+        <mc:Choice Requires="a14">
+          <p:sp>
+            <p:nvSpPr>
+              <p:cNvPr id="4" name="TextBox 3">
+                <a:extLst>
+                  <a:ext uri="{FF2B5EF4-FFF2-40B4-BE49-F238E27FC236}">
+                    <a16:creationId xmlns:a16="http://schemas.microsoft.com/office/drawing/2014/main" id="{5AA90B60-EF7A-7AC6-7842-1C4AC0499526}"/>
+                  </a:ext>
+                </a:extLst>
+              </p:cNvPr>
+              <p:cNvSpPr txBox="1"/>
+              <p:nvPr/>
+            </p:nvSpPr>
+            <p:spPr>
+              <a:xfrm>
+                <a:off x="9115008" y="4555555"/>
+                <a:ext cx="668581" cy="369332"/>
+              </a:xfrm>
+              <a:prstGeom prst="rect">
+                <a:avLst/>
+              </a:prstGeom>
+              <a:noFill/>
+            </p:spPr>
+            <p:txBody>
+              <a:bodyPr wrap="none" rtlCol="0">
+                <a:spAutoFit/>
+              </a:bodyPr>
+              <a:lstStyle/>
+              <a:p>
+                <a:r>
+                  <a:rPr lang="en-US" sz="1600" dirty="0">
+                    <a:solidFill>
+                      <a:srgbClr val="0070C0"/>
+                    </a:solidFill>
+                    <a:latin typeface="Berlin Sans FB" panose="020E0602020502020306" pitchFamily="34" charset="0"/>
+                  </a:rPr>
+                  <a:t>220</a:t>
+                </a:r>
+                <a14:m>
+                  <m:oMath xmlns:m="http://schemas.openxmlformats.org/officeDocument/2006/math">
+                    <m:r>
+                      <a:rPr lang="en-US" sz="1800" i="1" smtClean="0">
+                        <a:solidFill>
+                          <a:srgbClr val="0070C0"/>
+                        </a:solidFill>
+                        <a:effectLst/>
+                        <a:latin typeface="Cambria Math" panose="02040503050406030204" pitchFamily="18" charset="0"/>
+                        <a:ea typeface="Calibri" panose="020F0502020204030204" pitchFamily="34" charset="0"/>
+                        <a:cs typeface="Times New Roman" panose="02020603050405020304" pitchFamily="18" charset="0"/>
+                      </a:rPr>
+                      <m:t>𝛺</m:t>
+                    </m:r>
+                  </m:oMath>
+                </a14:m>
+                <a:endParaRPr lang="en-US" sz="1600" dirty="0">
+                  <a:solidFill>
+                    <a:srgbClr val="0070C0"/>
+                  </a:solidFill>
+                  <a:latin typeface="Berlin Sans FB" panose="020E0602020502020306" pitchFamily="34" charset="0"/>
+                </a:endParaRPr>
+              </a:p>
+            </p:txBody>
+          </p:sp>
+        </mc:Choice>
+        <mc:Fallback xmlns="">
+          <p:sp>
+            <p:nvSpPr>
+              <p:cNvPr id="4" name="TextBox 3">
+                <a:extLst>
+                  <a:ext uri="{FF2B5EF4-FFF2-40B4-BE49-F238E27FC236}">
+                    <a16:creationId xmlns:a16="http://schemas.microsoft.com/office/drawing/2014/main" id="{5AA90B60-EF7A-7AC6-7842-1C4AC0499526}"/>
+                  </a:ext>
+                </a:extLst>
+              </p:cNvPr>
+              <p:cNvSpPr txBox="1">
+                <a:spLocks noRot="1" noChangeAspect="1" noMove="1" noResize="1" noEditPoints="1" noAdjustHandles="1" noChangeArrowheads="1" noChangeShapeType="1" noTextEdit="1"/>
+              </p:cNvSpPr>
+              <p:nvPr/>
+            </p:nvSpPr>
+            <p:spPr>
+              <a:xfrm>
+                <a:off x="9115008" y="4555555"/>
+                <a:ext cx="668581" cy="369332"/>
+              </a:xfrm>
+              <a:prstGeom prst="rect">
+                <a:avLst/>
+              </a:prstGeom>
+              <a:blipFill>
+                <a:blip r:embed="rId8"/>
+                <a:stretch>
+                  <a:fillRect l="-4545" b="-19672"/>
+                </a:stretch>
+              </a:blipFill>
+            </p:spPr>
+            <p:txBody>
+              <a:bodyPr/>
+              <a:lstStyle/>
+              <a:p>
+                <a:r>
+                  <a:rPr lang="en-US">
+                    <a:noFill/>
+                  </a:rPr>
+                  <a:t> </a:t>
+                </a:r>
+              </a:p>
+            </p:txBody>
+          </p:sp>
+        </mc:Fallback>
+      </mc:AlternateContent>
     </p:spTree>
     <p:extLst>
       <p:ext uri="{BB962C8B-B14F-4D97-AF65-F5344CB8AC3E}">
@@ -11574,13 +11785,13 @@
   <p:clrMapOvr>
     <a:masterClrMapping/>
   </p:clrMapOvr>
-  <mc:AlternateContent xmlns:mc="http://schemas.openxmlformats.org/markup-compatibility/2006">
-    <mc:Choice xmlns:p159="http://schemas.microsoft.com/office/powerpoint/2015/09/main" Requires="p159">
+  <mc:AlternateContent xmlns:mc="http://schemas.openxmlformats.org/markup-compatibility/2006" xmlns:p159="http://schemas.microsoft.com/office/powerpoint/2015/09/main">
+    <mc:Choice Requires="p159">
       <p:transition xmlns:p14="http://schemas.microsoft.com/office/powerpoint/2010/main" spd="slow" p14:dur="2000">
         <p159:morph option="byObject"/>
       </p:transition>
     </mc:Choice>
-    <mc:Fallback>
+    <mc:Fallback xmlns="">
       <p:transition spd="slow">
         <p:fade/>
       </p:transition>
@@ -13777,46 +13988,6 @@
                 <a:latin typeface="Berlin Sans FB" panose="020E0602020502020306" pitchFamily="34" charset="0"/>
               </a:rPr>
               <a:t>1k</a:t>
-            </a:r>
-          </a:p>
-        </p:txBody>
-      </p:sp>
-      <p:sp>
-        <p:nvSpPr>
-          <p:cNvPr id="25" name="TextBox 24">
-            <a:extLst>
-              <a:ext uri="{FF2B5EF4-FFF2-40B4-BE49-F238E27FC236}">
-                <a16:creationId xmlns:a16="http://schemas.microsoft.com/office/drawing/2014/main" id="{39A086BE-DC0F-6D96-2124-B549BE7E1AE6}"/>
-              </a:ext>
-            </a:extLst>
-          </p:cNvPr>
-          <p:cNvSpPr txBox="1"/>
-          <p:nvPr/>
-        </p:nvSpPr>
-        <p:spPr>
-          <a:xfrm>
-            <a:off x="9115008" y="4555555"/>
-            <a:ext cx="505267" cy="338554"/>
-          </a:xfrm>
-          <a:prstGeom prst="rect">
-            <a:avLst/>
-          </a:prstGeom>
-          <a:noFill/>
-        </p:spPr>
-        <p:txBody>
-          <a:bodyPr wrap="none" rtlCol="0">
-            <a:spAutoFit/>
-          </a:bodyPr>
-          <a:lstStyle/>
-          <a:p>
-            <a:r>
-              <a:rPr lang="en-US" sz="1600" dirty="0">
-                <a:solidFill>
-                  <a:srgbClr val="2985FD"/>
-                </a:solidFill>
-                <a:latin typeface="Berlin Sans FB" panose="020E0602020502020306" pitchFamily="34" charset="0"/>
-              </a:rPr>
-              <a:t>220</a:t>
             </a:r>
           </a:p>
         </p:txBody>
@@ -14369,6 +14540,116 @@
           </a:graphicData>
         </a:graphic>
       </p:graphicFrame>
+      <mc:AlternateContent xmlns:mc="http://schemas.openxmlformats.org/markup-compatibility/2006" xmlns:a14="http://schemas.microsoft.com/office/drawing/2010/main">
+        <mc:Choice Requires="a14">
+          <p:sp>
+            <p:nvSpPr>
+              <p:cNvPr id="4" name="TextBox 3">
+                <a:extLst>
+                  <a:ext uri="{FF2B5EF4-FFF2-40B4-BE49-F238E27FC236}">
+                    <a16:creationId xmlns:a16="http://schemas.microsoft.com/office/drawing/2014/main" id="{2470F33F-5BD1-41D4-CD06-510334B96AA6}"/>
+                  </a:ext>
+                </a:extLst>
+              </p:cNvPr>
+              <p:cNvSpPr txBox="1"/>
+              <p:nvPr/>
+            </p:nvSpPr>
+            <p:spPr>
+              <a:xfrm>
+                <a:off x="9115008" y="4555555"/>
+                <a:ext cx="668581" cy="369332"/>
+              </a:xfrm>
+              <a:prstGeom prst="rect">
+                <a:avLst/>
+              </a:prstGeom>
+              <a:noFill/>
+            </p:spPr>
+            <p:txBody>
+              <a:bodyPr wrap="none" rtlCol="0">
+                <a:spAutoFit/>
+              </a:bodyPr>
+              <a:lstStyle/>
+              <a:p>
+                <a:r>
+                  <a:rPr lang="en-US" sz="1600" dirty="0">
+                    <a:solidFill>
+                      <a:srgbClr val="0070C0"/>
+                    </a:solidFill>
+                    <a:latin typeface="Berlin Sans FB" panose="020E0602020502020306" pitchFamily="34" charset="0"/>
+                  </a:rPr>
+                  <a:t>220</a:t>
+                </a:r>
+                <a14:m>
+                  <m:oMath xmlns:m="http://schemas.openxmlformats.org/officeDocument/2006/math">
+                    <m:r>
+                      <a:rPr lang="en-US" sz="1800" i="1" smtClean="0">
+                        <a:solidFill>
+                          <a:srgbClr val="0070C0"/>
+                        </a:solidFill>
+                        <a:effectLst/>
+                        <a:latin typeface="Cambria Math" panose="02040503050406030204" pitchFamily="18" charset="0"/>
+                        <a:ea typeface="Calibri" panose="020F0502020204030204" pitchFamily="34" charset="0"/>
+                        <a:cs typeface="Times New Roman" panose="02020603050405020304" pitchFamily="18" charset="0"/>
+                      </a:rPr>
+                      <m:t>𝛺</m:t>
+                    </m:r>
+                  </m:oMath>
+                </a14:m>
+                <a:endParaRPr lang="en-US" sz="1600" dirty="0">
+                  <a:solidFill>
+                    <a:srgbClr val="0070C0"/>
+                  </a:solidFill>
+                  <a:latin typeface="Berlin Sans FB" panose="020E0602020502020306" pitchFamily="34" charset="0"/>
+                </a:endParaRPr>
+              </a:p>
+            </p:txBody>
+          </p:sp>
+        </mc:Choice>
+        <mc:Fallback xmlns="">
+          <p:sp>
+            <p:nvSpPr>
+              <p:cNvPr id="4" name="TextBox 3">
+                <a:extLst>
+                  <a:ext uri="{FF2B5EF4-FFF2-40B4-BE49-F238E27FC236}">
+                    <a16:creationId xmlns:a16="http://schemas.microsoft.com/office/drawing/2014/main" id="{2470F33F-5BD1-41D4-CD06-510334B96AA6}"/>
+                  </a:ext>
+                </a:extLst>
+              </p:cNvPr>
+              <p:cNvSpPr txBox="1">
+                <a:spLocks noRot="1" noChangeAspect="1" noMove="1" noResize="1" noEditPoints="1" noAdjustHandles="1" noChangeArrowheads="1" noChangeShapeType="1" noTextEdit="1"/>
+              </p:cNvSpPr>
+              <p:nvPr/>
+            </p:nvSpPr>
+            <p:spPr>
+              <a:xfrm>
+                <a:off x="9115008" y="4555555"/>
+                <a:ext cx="668581" cy="369332"/>
+              </a:xfrm>
+              <a:prstGeom prst="rect">
+                <a:avLst/>
+              </a:prstGeom>
+              <a:blipFill>
+                <a:blip r:embed="rId8"/>
+                <a:stretch>
+                  <a:fillRect l="-4545" b="-19672"/>
+                </a:stretch>
+              </a:blipFill>
+            </p:spPr>
+            <p:txBody>
+              <a:bodyPr/>
+              <a:lstStyle/>
+              <a:p>
+                <a:r>
+                  <a:rPr lang="en-US">
+                    <a:noFill/>
+                  </a:rPr>
+                  <a:t> </a:t>
+                </a:r>
+              </a:p>
+            </p:txBody>
+          </p:sp>
+        </mc:Fallback>
+      </mc:AlternateContent>
     </p:spTree>
     <p:extLst>
       <p:ext uri="{BB962C8B-B14F-4D97-AF65-F5344CB8AC3E}">
@@ -14379,13 +14660,13 @@
   <p:clrMapOvr>
     <a:masterClrMapping/>
   </p:clrMapOvr>
-  <mc:AlternateContent xmlns:mc="http://schemas.openxmlformats.org/markup-compatibility/2006">
-    <mc:Choice xmlns:p159="http://schemas.microsoft.com/office/powerpoint/2015/09/main" Requires="p159">
+  <mc:AlternateContent xmlns:mc="http://schemas.openxmlformats.org/markup-compatibility/2006" xmlns:p159="http://schemas.microsoft.com/office/powerpoint/2015/09/main">
+    <mc:Choice Requires="p159">
       <p:transition xmlns:p14="http://schemas.microsoft.com/office/powerpoint/2010/main" spd="slow" p14:dur="2000">
         <p159:morph option="byObject"/>
       </p:transition>
     </mc:Choice>
-    <mc:Fallback>
+    <mc:Fallback xmlns="">
       <p:transition spd="slow">
         <p:fade/>
       </p:transition>
@@ -17184,13 +17465,13 @@
   <p:clrMapOvr>
     <a:masterClrMapping/>
   </p:clrMapOvr>
-  <mc:AlternateContent xmlns:mc="http://schemas.openxmlformats.org/markup-compatibility/2006">
-    <mc:Choice xmlns:p159="http://schemas.microsoft.com/office/powerpoint/2015/09/main" Requires="p159">
+  <mc:AlternateContent xmlns:mc="http://schemas.openxmlformats.org/markup-compatibility/2006" xmlns:p159="http://schemas.microsoft.com/office/powerpoint/2015/09/main">
+    <mc:Choice Requires="p159">
       <p:transition xmlns:p14="http://schemas.microsoft.com/office/powerpoint/2010/main" spd="slow" p14:dur="2000">
         <p159:morph option="byObject"/>
       </p:transition>
     </mc:Choice>
-    <mc:Fallback>
+    <mc:Fallback xmlns="">
       <p:transition spd="slow">
         <p:fade/>
       </p:transition>
@@ -19387,46 +19668,6 @@
                 <a:latin typeface="Berlin Sans FB" panose="020E0602020502020306" pitchFamily="34" charset="0"/>
               </a:rPr>
               <a:t>1k</a:t>
-            </a:r>
-          </a:p>
-        </p:txBody>
-      </p:sp>
-      <p:sp>
-        <p:nvSpPr>
-          <p:cNvPr id="25" name="TextBox 24">
-            <a:extLst>
-              <a:ext uri="{FF2B5EF4-FFF2-40B4-BE49-F238E27FC236}">
-                <a16:creationId xmlns:a16="http://schemas.microsoft.com/office/drawing/2014/main" id="{81022601-FE2D-103A-6238-14587B88372E}"/>
-              </a:ext>
-            </a:extLst>
-          </p:cNvPr>
-          <p:cNvSpPr txBox="1"/>
-          <p:nvPr/>
-        </p:nvSpPr>
-        <p:spPr>
-          <a:xfrm>
-            <a:off x="9115008" y="4555555"/>
-            <a:ext cx="505267" cy="338554"/>
-          </a:xfrm>
-          <a:prstGeom prst="rect">
-            <a:avLst/>
-          </a:prstGeom>
-          <a:noFill/>
-        </p:spPr>
-        <p:txBody>
-          <a:bodyPr wrap="none" rtlCol="0">
-            <a:spAutoFit/>
-          </a:bodyPr>
-          <a:lstStyle/>
-          <a:p>
-            <a:r>
-              <a:rPr lang="en-US" sz="1600" dirty="0">
-                <a:solidFill>
-                  <a:srgbClr val="2985FD"/>
-                </a:solidFill>
-                <a:latin typeface="Berlin Sans FB" panose="020E0602020502020306" pitchFamily="34" charset="0"/>
-              </a:rPr>
-              <a:t>220</a:t>
             </a:r>
           </a:p>
         </p:txBody>
@@ -19979,6 +20220,116 @@
           </a:graphicData>
         </a:graphic>
       </p:graphicFrame>
+      <mc:AlternateContent xmlns:mc="http://schemas.openxmlformats.org/markup-compatibility/2006" xmlns:a14="http://schemas.microsoft.com/office/drawing/2010/main">
+        <mc:Choice Requires="a14">
+          <p:sp>
+            <p:nvSpPr>
+              <p:cNvPr id="4" name="TextBox 3">
+                <a:extLst>
+                  <a:ext uri="{FF2B5EF4-FFF2-40B4-BE49-F238E27FC236}">
+                    <a16:creationId xmlns:a16="http://schemas.microsoft.com/office/drawing/2014/main" id="{63C1E72A-EAC7-010A-E07A-588FF36672EF}"/>
+                  </a:ext>
+                </a:extLst>
+              </p:cNvPr>
+              <p:cNvSpPr txBox="1"/>
+              <p:nvPr/>
+            </p:nvSpPr>
+            <p:spPr>
+              <a:xfrm>
+                <a:off x="9115008" y="4555555"/>
+                <a:ext cx="668581" cy="369332"/>
+              </a:xfrm>
+              <a:prstGeom prst="rect">
+                <a:avLst/>
+              </a:prstGeom>
+              <a:noFill/>
+            </p:spPr>
+            <p:txBody>
+              <a:bodyPr wrap="none" rtlCol="0">
+                <a:spAutoFit/>
+              </a:bodyPr>
+              <a:lstStyle/>
+              <a:p>
+                <a:r>
+                  <a:rPr lang="en-US" sz="1600" dirty="0">
+                    <a:solidFill>
+                      <a:srgbClr val="0070C0"/>
+                    </a:solidFill>
+                    <a:latin typeface="Berlin Sans FB" panose="020E0602020502020306" pitchFamily="34" charset="0"/>
+                  </a:rPr>
+                  <a:t>220</a:t>
+                </a:r>
+                <a14:m>
+                  <m:oMath xmlns:m="http://schemas.openxmlformats.org/officeDocument/2006/math">
+                    <m:r>
+                      <a:rPr lang="en-US" sz="1800" i="1" smtClean="0">
+                        <a:solidFill>
+                          <a:srgbClr val="0070C0"/>
+                        </a:solidFill>
+                        <a:effectLst/>
+                        <a:latin typeface="Cambria Math" panose="02040503050406030204" pitchFamily="18" charset="0"/>
+                        <a:ea typeface="Calibri" panose="020F0502020204030204" pitchFamily="34" charset="0"/>
+                        <a:cs typeface="Times New Roman" panose="02020603050405020304" pitchFamily="18" charset="0"/>
+                      </a:rPr>
+                      <m:t>𝛺</m:t>
+                    </m:r>
+                  </m:oMath>
+                </a14:m>
+                <a:endParaRPr lang="en-US" sz="1600" dirty="0">
+                  <a:solidFill>
+                    <a:srgbClr val="0070C0"/>
+                  </a:solidFill>
+                  <a:latin typeface="Berlin Sans FB" panose="020E0602020502020306" pitchFamily="34" charset="0"/>
+                </a:endParaRPr>
+              </a:p>
+            </p:txBody>
+          </p:sp>
+        </mc:Choice>
+        <mc:Fallback xmlns="">
+          <p:sp>
+            <p:nvSpPr>
+              <p:cNvPr id="4" name="TextBox 3">
+                <a:extLst>
+                  <a:ext uri="{FF2B5EF4-FFF2-40B4-BE49-F238E27FC236}">
+                    <a16:creationId xmlns:a16="http://schemas.microsoft.com/office/drawing/2014/main" id="{63C1E72A-EAC7-010A-E07A-588FF36672EF}"/>
+                  </a:ext>
+                </a:extLst>
+              </p:cNvPr>
+              <p:cNvSpPr txBox="1">
+                <a:spLocks noRot="1" noChangeAspect="1" noMove="1" noResize="1" noEditPoints="1" noAdjustHandles="1" noChangeArrowheads="1" noChangeShapeType="1" noTextEdit="1"/>
+              </p:cNvSpPr>
+              <p:nvPr/>
+            </p:nvSpPr>
+            <p:spPr>
+              <a:xfrm>
+                <a:off x="9115008" y="4555555"/>
+                <a:ext cx="668581" cy="369332"/>
+              </a:xfrm>
+              <a:prstGeom prst="rect">
+                <a:avLst/>
+              </a:prstGeom>
+              <a:blipFill>
+                <a:blip r:embed="rId8"/>
+                <a:stretch>
+                  <a:fillRect l="-4545" b="-19672"/>
+                </a:stretch>
+              </a:blipFill>
+            </p:spPr>
+            <p:txBody>
+              <a:bodyPr/>
+              <a:lstStyle/>
+              <a:p>
+                <a:r>
+                  <a:rPr lang="en-US">
+                    <a:noFill/>
+                  </a:rPr>
+                  <a:t> </a:t>
+                </a:r>
+              </a:p>
+            </p:txBody>
+          </p:sp>
+        </mc:Fallback>
+      </mc:AlternateContent>
     </p:spTree>
     <p:extLst>
       <p:ext uri="{BB962C8B-B14F-4D97-AF65-F5344CB8AC3E}">
@@ -19989,13 +20340,13 @@
   <p:clrMapOvr>
     <a:masterClrMapping/>
   </p:clrMapOvr>
-  <mc:AlternateContent xmlns:mc="http://schemas.openxmlformats.org/markup-compatibility/2006">
-    <mc:Choice xmlns:p159="http://schemas.microsoft.com/office/powerpoint/2015/09/main" Requires="p159">
+  <mc:AlternateContent xmlns:mc="http://schemas.openxmlformats.org/markup-compatibility/2006" xmlns:p159="http://schemas.microsoft.com/office/powerpoint/2015/09/main">
+    <mc:Choice Requires="p159">
       <p:transition xmlns:p14="http://schemas.microsoft.com/office/powerpoint/2010/main" spd="slow" p14:dur="2000">
         <p159:morph option="byObject"/>
       </p:transition>
     </mc:Choice>
-    <mc:Fallback>
+    <mc:Fallback xmlns="">
       <p:transition spd="slow">
         <p:fade/>
       </p:transition>
@@ -22192,46 +22543,6 @@
                 <a:latin typeface="Berlin Sans FB" panose="020E0602020502020306" pitchFamily="34" charset="0"/>
               </a:rPr>
               <a:t>1k</a:t>
-            </a:r>
-          </a:p>
-        </p:txBody>
-      </p:sp>
-      <p:sp>
-        <p:nvSpPr>
-          <p:cNvPr id="25" name="TextBox 24">
-            <a:extLst>
-              <a:ext uri="{FF2B5EF4-FFF2-40B4-BE49-F238E27FC236}">
-                <a16:creationId xmlns:a16="http://schemas.microsoft.com/office/drawing/2014/main" id="{C05FDA7F-58D8-6EC9-326E-216C7916D691}"/>
-              </a:ext>
-            </a:extLst>
-          </p:cNvPr>
-          <p:cNvSpPr txBox="1"/>
-          <p:nvPr/>
-        </p:nvSpPr>
-        <p:spPr>
-          <a:xfrm>
-            <a:off x="9115008" y="4555555"/>
-            <a:ext cx="505267" cy="338554"/>
-          </a:xfrm>
-          <a:prstGeom prst="rect">
-            <a:avLst/>
-          </a:prstGeom>
-          <a:noFill/>
-        </p:spPr>
-        <p:txBody>
-          <a:bodyPr wrap="none" rtlCol="0">
-            <a:spAutoFit/>
-          </a:bodyPr>
-          <a:lstStyle/>
-          <a:p>
-            <a:r>
-              <a:rPr lang="en-US" sz="1600" dirty="0">
-                <a:solidFill>
-                  <a:srgbClr val="2985FD"/>
-                </a:solidFill>
-                <a:latin typeface="Berlin Sans FB" panose="020E0602020502020306" pitchFamily="34" charset="0"/>
-              </a:rPr>
-              <a:t>220</a:t>
             </a:r>
           </a:p>
         </p:txBody>
@@ -22925,6 +23236,218 @@
           </a:fontRef>
         </p:style>
       </p:cxnSp>
+      <p:sp>
+        <p:nvSpPr>
+          <p:cNvPr id="44" name="Oval 43">
+            <a:extLst>
+              <a:ext uri="{FF2B5EF4-FFF2-40B4-BE49-F238E27FC236}">
+                <a16:creationId xmlns:a16="http://schemas.microsoft.com/office/drawing/2014/main" id="{1E27D039-9863-6E67-7EA0-30547096EF13}"/>
+              </a:ext>
+            </a:extLst>
+          </p:cNvPr>
+          <p:cNvSpPr/>
+          <p:nvPr/>
+        </p:nvSpPr>
+        <p:spPr>
+          <a:xfrm>
+            <a:off x="9870235" y="2212659"/>
+            <a:ext cx="2189499" cy="2592474"/>
+          </a:xfrm>
+          <a:prstGeom prst="ellipse">
+            <a:avLst/>
+          </a:prstGeom>
+          <a:gradFill flip="none" rotWithShape="1">
+            <a:gsLst>
+              <a:gs pos="0">
+                <a:schemeClr val="accent1">
+                  <a:lumMod val="25000"/>
+                  <a:lumOff val="75000"/>
+                  <a:alpha val="10000"/>
+                </a:schemeClr>
+              </a:gs>
+              <a:gs pos="74000">
+                <a:srgbClr val="43A1FF"/>
+              </a:gs>
+              <a:gs pos="83000">
+                <a:srgbClr val="2985FD"/>
+              </a:gs>
+              <a:gs pos="100000">
+                <a:srgbClr val="43A1FF"/>
+              </a:gs>
+            </a:gsLst>
+            <a:lin ang="2700000" scaled="1"/>
+            <a:tileRect/>
+          </a:gradFill>
+          <a:ln>
+            <a:gradFill>
+              <a:gsLst>
+                <a:gs pos="0">
+                  <a:schemeClr val="accent1">
+                    <a:lumMod val="5000"/>
+                    <a:lumOff val="95000"/>
+                  </a:schemeClr>
+                </a:gs>
+                <a:gs pos="74000">
+                  <a:schemeClr val="accent1">
+                    <a:lumMod val="45000"/>
+                    <a:lumOff val="55000"/>
+                  </a:schemeClr>
+                </a:gs>
+                <a:gs pos="83000">
+                  <a:schemeClr val="accent1">
+                    <a:lumMod val="45000"/>
+                    <a:lumOff val="55000"/>
+                  </a:schemeClr>
+                </a:gs>
+                <a:gs pos="100000">
+                  <a:schemeClr val="accent1">
+                    <a:lumMod val="30000"/>
+                    <a:lumOff val="70000"/>
+                  </a:schemeClr>
+                </a:gs>
+              </a:gsLst>
+              <a:lin ang="5400000" scaled="1"/>
+            </a:gradFill>
+          </a:ln>
+          <a:effectLst>
+            <a:softEdge rad="406400"/>
+          </a:effectLst>
+        </p:spPr>
+        <p:style>
+          <a:lnRef idx="2">
+            <a:schemeClr val="accent1">
+              <a:shade val="15000"/>
+            </a:schemeClr>
+          </a:lnRef>
+          <a:fillRef idx="1">
+            <a:schemeClr val="accent1"/>
+          </a:fillRef>
+          <a:effectRef idx="0">
+            <a:schemeClr val="accent1"/>
+          </a:effectRef>
+          <a:fontRef idx="minor">
+            <a:schemeClr val="lt1"/>
+          </a:fontRef>
+        </p:style>
+        <p:txBody>
+          <a:bodyPr rtlCol="0" anchor="ctr"/>
+          <a:lstStyle/>
+          <a:p>
+            <a:pPr algn="ctr"/>
+            <a:endParaRPr lang="en-US"/>
+          </a:p>
+        </p:txBody>
+      </p:sp>
+      <mc:AlternateContent xmlns:mc="http://schemas.openxmlformats.org/markup-compatibility/2006" xmlns:a14="http://schemas.microsoft.com/office/drawing/2010/main">
+        <mc:Choice Requires="a14">
+          <p:sp>
+            <p:nvSpPr>
+              <p:cNvPr id="45" name="TextBox 44">
+                <a:extLst>
+                  <a:ext uri="{FF2B5EF4-FFF2-40B4-BE49-F238E27FC236}">
+                    <a16:creationId xmlns:a16="http://schemas.microsoft.com/office/drawing/2014/main" id="{5D114F99-0BD0-D3E3-0E6B-EA6F26C5EDF1}"/>
+                  </a:ext>
+                </a:extLst>
+              </p:cNvPr>
+              <p:cNvSpPr txBox="1"/>
+              <p:nvPr/>
+            </p:nvSpPr>
+            <p:spPr>
+              <a:xfrm>
+                <a:off x="9115008" y="4555555"/>
+                <a:ext cx="668581" cy="369332"/>
+              </a:xfrm>
+              <a:prstGeom prst="rect">
+                <a:avLst/>
+              </a:prstGeom>
+              <a:noFill/>
+            </p:spPr>
+            <p:txBody>
+              <a:bodyPr wrap="none" rtlCol="0">
+                <a:spAutoFit/>
+              </a:bodyPr>
+              <a:lstStyle/>
+              <a:p>
+                <a:r>
+                  <a:rPr lang="en-US" sz="1600" dirty="0">
+                    <a:solidFill>
+                      <a:srgbClr val="0070C0"/>
+                    </a:solidFill>
+                    <a:latin typeface="Berlin Sans FB" panose="020E0602020502020306" pitchFamily="34" charset="0"/>
+                  </a:rPr>
+                  <a:t>220</a:t>
+                </a:r>
+                <a14:m>
+                  <m:oMath xmlns:m="http://schemas.openxmlformats.org/officeDocument/2006/math">
+                    <m:r>
+                      <a:rPr lang="en-US" sz="1800" i="1" smtClean="0">
+                        <a:solidFill>
+                          <a:srgbClr val="0070C0"/>
+                        </a:solidFill>
+                        <a:effectLst/>
+                        <a:latin typeface="Cambria Math" panose="02040503050406030204" pitchFamily="18" charset="0"/>
+                        <a:ea typeface="Calibri" panose="020F0502020204030204" pitchFamily="34" charset="0"/>
+                        <a:cs typeface="Times New Roman" panose="02020603050405020304" pitchFamily="18" charset="0"/>
+                      </a:rPr>
+                      <m:t>𝛺</m:t>
+                    </m:r>
+                  </m:oMath>
+                </a14:m>
+                <a:endParaRPr lang="en-US" sz="1600" dirty="0">
+                  <a:solidFill>
+                    <a:srgbClr val="0070C0"/>
+                  </a:solidFill>
+                  <a:latin typeface="Berlin Sans FB" panose="020E0602020502020306" pitchFamily="34" charset="0"/>
+                </a:endParaRPr>
+              </a:p>
+            </p:txBody>
+          </p:sp>
+        </mc:Choice>
+        <mc:Fallback xmlns="">
+          <p:sp>
+            <p:nvSpPr>
+              <p:cNvPr id="45" name="TextBox 44">
+                <a:extLst>
+                  <a:ext uri="{FF2B5EF4-FFF2-40B4-BE49-F238E27FC236}">
+                    <a16:creationId xmlns:a16="http://schemas.microsoft.com/office/drawing/2014/main" id="{5D114F99-0BD0-D3E3-0E6B-EA6F26C5EDF1}"/>
+                  </a:ext>
+                </a:extLst>
+              </p:cNvPr>
+              <p:cNvSpPr txBox="1">
+                <a:spLocks noRot="1" noChangeAspect="1" noMove="1" noResize="1" noEditPoints="1" noAdjustHandles="1" noChangeArrowheads="1" noChangeShapeType="1" noTextEdit="1"/>
+              </p:cNvSpPr>
+              <p:nvPr/>
+            </p:nvSpPr>
+            <p:spPr>
+              <a:xfrm>
+                <a:off x="9115008" y="4555555"/>
+                <a:ext cx="668581" cy="369332"/>
+              </a:xfrm>
+              <a:prstGeom prst="rect">
+                <a:avLst/>
+              </a:prstGeom>
+              <a:blipFill>
+                <a:blip r:embed="rId8"/>
+                <a:stretch>
+                  <a:fillRect l="-4545" b="-19672"/>
+                </a:stretch>
+              </a:blipFill>
+            </p:spPr>
+            <p:txBody>
+              <a:bodyPr/>
+              <a:lstStyle/>
+              <a:p>
+                <a:r>
+                  <a:rPr lang="en-US">
+                    <a:noFill/>
+                  </a:rPr>
+                  <a:t> </a:t>
+                </a:r>
+              </a:p>
+            </p:txBody>
+          </p:sp>
+        </mc:Fallback>
+      </mc:AlternateContent>
     </p:spTree>
     <p:extLst>
       <p:ext uri="{BB962C8B-B14F-4D97-AF65-F5344CB8AC3E}">
@@ -22935,13 +23458,13 @@
   <p:clrMapOvr>
     <a:masterClrMapping/>
   </p:clrMapOvr>
-  <mc:AlternateContent xmlns:mc="http://schemas.openxmlformats.org/markup-compatibility/2006">
-    <mc:Choice xmlns:p159="http://schemas.microsoft.com/office/powerpoint/2015/09/main" Requires="p159">
+  <mc:AlternateContent xmlns:mc="http://schemas.openxmlformats.org/markup-compatibility/2006" xmlns:p159="http://schemas.microsoft.com/office/powerpoint/2015/09/main">
+    <mc:Choice Requires="p159">
       <p:transition xmlns:p14="http://schemas.microsoft.com/office/powerpoint/2010/main" spd="slow" p14:dur="2000">
         <p159:morph option="byObject"/>
       </p:transition>
     </mc:Choice>
-    <mc:Fallback>
+    <mc:Fallback xmlns="">
       <p:transition spd="slow">
         <p:fade/>
       </p:transition>
@@ -23173,6 +23696,2390 @@
       </p:par>
     </p:tnLst>
   </p:timing>
+</p:sld>
+</file>
+
+<file path=ppt/slides/slide9.xml><?xml version="1.0" encoding="utf-8"?>
+<p:sld xmlns:a="http://schemas.openxmlformats.org/drawingml/2006/main" xmlns:r="http://schemas.openxmlformats.org/officeDocument/2006/relationships" xmlns:p="http://schemas.openxmlformats.org/presentationml/2006/main">
+  <p:cSld>
+    <p:spTree>
+      <p:nvGrpSpPr>
+        <p:cNvPr id="1" name="">
+          <a:extLst>
+            <a:ext uri="{FF2B5EF4-FFF2-40B4-BE49-F238E27FC236}">
+              <a16:creationId xmlns:a16="http://schemas.microsoft.com/office/drawing/2014/main" id="{4FD87AAC-4F6D-91B2-135A-14BEC71937AA}"/>
+            </a:ext>
+          </a:extLst>
+        </p:cNvPr>
+        <p:cNvGrpSpPr/>
+        <p:nvPr/>
+      </p:nvGrpSpPr>
+      <p:grpSpPr>
+        <a:xfrm>
+          <a:off x="0" y="0"/>
+          <a:ext cx="0" cy="0"/>
+          <a:chOff x="0" y="0"/>
+          <a:chExt cx="0" cy="0"/>
+        </a:xfrm>
+      </p:grpSpPr>
+      <p:grpSp>
+        <p:nvGrpSpPr>
+          <p:cNvPr id="108" name="Group 107">
+            <a:extLst>
+              <a:ext uri="{FF2B5EF4-FFF2-40B4-BE49-F238E27FC236}">
+                <a16:creationId xmlns:a16="http://schemas.microsoft.com/office/drawing/2014/main" id="{4FAFB738-6BA9-BC47-ECB9-DD00073ED5B2}"/>
+              </a:ext>
+            </a:extLst>
+          </p:cNvPr>
+          <p:cNvGrpSpPr/>
+          <p:nvPr/>
+        </p:nvGrpSpPr>
+        <p:grpSpPr>
+          <a:xfrm>
+            <a:off x="1041952" y="168966"/>
+            <a:ext cx="10466287" cy="6022744"/>
+            <a:chOff x="1232452" y="854766"/>
+            <a:chExt cx="10466287" cy="6022744"/>
+          </a:xfrm>
+        </p:grpSpPr>
+        <p:pic>
+          <p:nvPicPr>
+            <p:cNvPr id="91" name="Picture 90">
+              <a:extLst>
+                <a:ext uri="{FF2B5EF4-FFF2-40B4-BE49-F238E27FC236}">
+                  <a16:creationId xmlns:a16="http://schemas.microsoft.com/office/drawing/2014/main" id="{B7488CF2-003E-EF9E-F07F-DB2579EC47A1}"/>
+                </a:ext>
+              </a:extLst>
+            </p:cNvPr>
+            <p:cNvPicPr>
+              <a:picLocks noChangeAspect="1"/>
+            </p:cNvPicPr>
+            <p:nvPr/>
+          </p:nvPicPr>
+          <p:blipFill>
+            <a:blip r:embed="rId2">
+              <a:extLst>
+                <a:ext uri="{28A0092B-C50C-407E-A947-70E740481C1C}">
+                  <a14:useLocalDpi xmlns:a14="http://schemas.microsoft.com/office/drawing/2010/main" val="0"/>
+                </a:ext>
+              </a:extLst>
+            </a:blip>
+            <a:srcRect t="36811" b="36590"/>
+            <a:stretch/>
+          </p:blipFill>
+          <p:spPr>
+            <a:xfrm rot="10800000" flipV="1">
+              <a:off x="9149729" y="5566361"/>
+              <a:ext cx="842909" cy="100031"/>
+            </a:xfrm>
+            <a:prstGeom prst="rect">
+              <a:avLst/>
+            </a:prstGeom>
+          </p:spPr>
+        </p:pic>
+        <p:pic>
+          <p:nvPicPr>
+            <p:cNvPr id="3" name="Picture 2">
+              <a:extLst>
+                <a:ext uri="{FF2B5EF4-FFF2-40B4-BE49-F238E27FC236}">
+                  <a16:creationId xmlns:a16="http://schemas.microsoft.com/office/drawing/2014/main" id="{CF1A982B-59C6-4B65-7C14-EE58056E9BC8}"/>
+                </a:ext>
+              </a:extLst>
+            </p:cNvPr>
+            <p:cNvPicPr>
+              <a:picLocks noChangeAspect="1"/>
+            </p:cNvPicPr>
+            <p:nvPr/>
+          </p:nvPicPr>
+          <p:blipFill>
+            <a:blip r:embed="rId3">
+              <a:extLst>
+                <a:ext uri="{28A0092B-C50C-407E-A947-70E740481C1C}">
+                  <a14:useLocalDpi xmlns:a14="http://schemas.microsoft.com/office/drawing/2010/main" val="0"/>
+                </a:ext>
+              </a:extLst>
+            </a:blip>
+            <a:srcRect l="16702" r="17632"/>
+            <a:stretch/>
+          </p:blipFill>
+          <p:spPr>
+            <a:xfrm>
+              <a:off x="7096891" y="3533926"/>
+              <a:ext cx="1217060" cy="2226023"/>
+            </a:xfrm>
+            <a:prstGeom prst="rect">
+              <a:avLst/>
+            </a:prstGeom>
+          </p:spPr>
+        </p:pic>
+        <p:pic>
+          <p:nvPicPr>
+            <p:cNvPr id="8" name="Picture 7">
+              <a:extLst>
+                <a:ext uri="{FF2B5EF4-FFF2-40B4-BE49-F238E27FC236}">
+                  <a16:creationId xmlns:a16="http://schemas.microsoft.com/office/drawing/2014/main" id="{88A00625-E99D-D36A-F732-08F1290AEFF1}"/>
+                </a:ext>
+              </a:extLst>
+            </p:cNvPr>
+            <p:cNvPicPr>
+              <a:picLocks noChangeAspect="1"/>
+            </p:cNvPicPr>
+            <p:nvPr/>
+          </p:nvPicPr>
+          <p:blipFill>
+            <a:blip r:embed="rId4">
+              <a:extLst>
+                <a:ext uri="{28A0092B-C50C-407E-A947-70E740481C1C}">
+                  <a14:useLocalDpi xmlns:a14="http://schemas.microsoft.com/office/drawing/2010/main" val="0"/>
+                </a:ext>
+              </a:extLst>
+            </a:blip>
+            <a:stretch>
+              <a:fillRect/>
+            </a:stretch>
+          </p:blipFill>
+          <p:spPr>
+            <a:xfrm rot="5400000">
+              <a:off x="1069170" y="1018048"/>
+              <a:ext cx="1950794" cy="1624229"/>
+            </a:xfrm>
+            <a:prstGeom prst="rect">
+              <a:avLst/>
+            </a:prstGeom>
+          </p:spPr>
+        </p:pic>
+        <p:pic>
+          <p:nvPicPr>
+            <p:cNvPr id="10" name="Picture 9">
+              <a:extLst>
+                <a:ext uri="{FF2B5EF4-FFF2-40B4-BE49-F238E27FC236}">
+                  <a16:creationId xmlns:a16="http://schemas.microsoft.com/office/drawing/2014/main" id="{F7F890BA-E289-FCE7-CCDD-CE31A3D08DB5}"/>
+                </a:ext>
+              </a:extLst>
+            </p:cNvPr>
+            <p:cNvPicPr>
+              <a:picLocks noChangeAspect="1"/>
+            </p:cNvPicPr>
+            <p:nvPr/>
+          </p:nvPicPr>
+          <p:blipFill>
+            <a:blip r:embed="rId5">
+              <a:extLst>
+                <a:ext uri="{28A0092B-C50C-407E-A947-70E740481C1C}">
+                  <a14:useLocalDpi xmlns:a14="http://schemas.microsoft.com/office/drawing/2010/main" val="0"/>
+                </a:ext>
+              </a:extLst>
+            </a:blip>
+            <a:srcRect l="28724" t="21357" r="22826" b="29462"/>
+            <a:stretch/>
+          </p:blipFill>
+          <p:spPr>
+            <a:xfrm>
+              <a:off x="9845354" y="3578952"/>
+              <a:ext cx="1853385" cy="2259616"/>
+            </a:xfrm>
+            <a:prstGeom prst="rect">
+              <a:avLst/>
+            </a:prstGeom>
+          </p:spPr>
+        </p:pic>
+        <p:pic>
+          <p:nvPicPr>
+            <p:cNvPr id="14" name="Picture 13">
+              <a:extLst>
+                <a:ext uri="{FF2B5EF4-FFF2-40B4-BE49-F238E27FC236}">
+                  <a16:creationId xmlns:a16="http://schemas.microsoft.com/office/drawing/2014/main" id="{DC5BDB39-0DC4-CFA5-BD58-1A18A0DE07DC}"/>
+                </a:ext>
+              </a:extLst>
+            </p:cNvPr>
+            <p:cNvPicPr>
+              <a:picLocks noChangeAspect="1"/>
+            </p:cNvPicPr>
+            <p:nvPr/>
+          </p:nvPicPr>
+          <p:blipFill>
+            <a:blip r:embed="rId2">
+              <a:extLst>
+                <a:ext uri="{28A0092B-C50C-407E-A947-70E740481C1C}">
+                  <a14:useLocalDpi xmlns:a14="http://schemas.microsoft.com/office/drawing/2010/main" val="0"/>
+                </a:ext>
+              </a:extLst>
+            </a:blip>
+            <a:srcRect t="36811" b="36590"/>
+            <a:stretch/>
+          </p:blipFill>
+          <p:spPr>
+            <a:xfrm rot="5400000" flipV="1">
+              <a:off x="4201832" y="3948403"/>
+              <a:ext cx="1075964" cy="127689"/>
+            </a:xfrm>
+            <a:prstGeom prst="rect">
+              <a:avLst/>
+            </a:prstGeom>
+          </p:spPr>
+        </p:pic>
+        <p:cxnSp>
+          <p:nvCxnSpPr>
+            <p:cNvPr id="18" name="Straight Connector 17">
+              <a:extLst>
+                <a:ext uri="{FF2B5EF4-FFF2-40B4-BE49-F238E27FC236}">
+                  <a16:creationId xmlns:a16="http://schemas.microsoft.com/office/drawing/2014/main" id="{24BA69A6-FCDA-7E8A-C93C-F89CA777582F}"/>
+                </a:ext>
+              </a:extLst>
+            </p:cNvPr>
+            <p:cNvCxnSpPr>
+              <a:cxnSpLocks/>
+            </p:cNvCxnSpPr>
+            <p:nvPr/>
+          </p:nvCxnSpPr>
+          <p:spPr>
+            <a:xfrm rot="5400000">
+              <a:off x="7288046" y="4210832"/>
+              <a:ext cx="1507008" cy="75791"/>
+            </a:xfrm>
+            <a:prstGeom prst="bentConnector3">
+              <a:avLst>
+                <a:gd name="adj1" fmla="val 50000"/>
+              </a:avLst>
+            </a:prstGeom>
+            <a:ln w="38100">
+              <a:solidFill>
+                <a:schemeClr val="tx1"/>
+              </a:solidFill>
+            </a:ln>
+          </p:spPr>
+          <p:style>
+            <a:lnRef idx="1">
+              <a:schemeClr val="dk1"/>
+            </a:lnRef>
+            <a:fillRef idx="0">
+              <a:schemeClr val="dk1"/>
+            </a:fillRef>
+            <a:effectRef idx="0">
+              <a:schemeClr val="dk1"/>
+            </a:effectRef>
+            <a:fontRef idx="minor">
+              <a:schemeClr val="tx1"/>
+            </a:fontRef>
+          </p:style>
+        </p:cxnSp>
+        <p:cxnSp>
+          <p:nvCxnSpPr>
+            <p:cNvPr id="22" name="Straight Connector 21">
+              <a:extLst>
+                <a:ext uri="{FF2B5EF4-FFF2-40B4-BE49-F238E27FC236}">
+                  <a16:creationId xmlns:a16="http://schemas.microsoft.com/office/drawing/2014/main" id="{9F13CFB9-B275-85EC-D08B-CA2D9DFCA9D7}"/>
+                </a:ext>
+              </a:extLst>
+            </p:cNvPr>
+            <p:cNvCxnSpPr>
+              <a:cxnSpLocks/>
+            </p:cNvCxnSpPr>
+            <p:nvPr/>
+          </p:nvCxnSpPr>
+          <p:spPr>
+            <a:xfrm>
+              <a:off x="2760198" y="1593594"/>
+              <a:ext cx="5283156" cy="1185477"/>
+            </a:xfrm>
+            <a:prstGeom prst="bentConnector3">
+              <a:avLst>
+                <a:gd name="adj1" fmla="val 115854"/>
+              </a:avLst>
+            </a:prstGeom>
+            <a:ln w="38100">
+              <a:solidFill>
+                <a:schemeClr val="tx1"/>
+              </a:solidFill>
+            </a:ln>
+          </p:spPr>
+          <p:style>
+            <a:lnRef idx="1">
+              <a:schemeClr val="dk1"/>
+            </a:lnRef>
+            <a:fillRef idx="0">
+              <a:schemeClr val="dk1"/>
+            </a:fillRef>
+            <a:effectRef idx="0">
+              <a:schemeClr val="dk1"/>
+            </a:effectRef>
+            <a:fontRef idx="minor">
+              <a:schemeClr val="tx1"/>
+            </a:fontRef>
+          </p:style>
+        </p:cxnSp>
+        <p:cxnSp>
+          <p:nvCxnSpPr>
+            <p:cNvPr id="26" name="Straight Connector 25">
+              <a:extLst>
+                <a:ext uri="{FF2B5EF4-FFF2-40B4-BE49-F238E27FC236}">
+                  <a16:creationId xmlns:a16="http://schemas.microsoft.com/office/drawing/2014/main" id="{D4AD5A7D-5994-D6F2-5C2B-7B474CE74AD2}"/>
+                </a:ext>
+              </a:extLst>
+            </p:cNvPr>
+            <p:cNvCxnSpPr>
+              <a:cxnSpLocks/>
+            </p:cNvCxnSpPr>
+            <p:nvPr/>
+          </p:nvCxnSpPr>
+          <p:spPr>
+            <a:xfrm>
+              <a:off x="4380506" y="1580174"/>
+              <a:ext cx="0" cy="1416390"/>
+            </a:xfrm>
+            <a:prstGeom prst="line">
+              <a:avLst/>
+            </a:prstGeom>
+            <a:ln w="38100">
+              <a:solidFill>
+                <a:schemeClr val="tx1"/>
+              </a:solidFill>
+            </a:ln>
+          </p:spPr>
+          <p:style>
+            <a:lnRef idx="1">
+              <a:schemeClr val="dk1"/>
+            </a:lnRef>
+            <a:fillRef idx="0">
+              <a:schemeClr val="dk1"/>
+            </a:fillRef>
+            <a:effectRef idx="0">
+              <a:schemeClr val="dk1"/>
+            </a:effectRef>
+            <a:fontRef idx="minor">
+              <a:schemeClr val="tx1"/>
+            </a:fontRef>
+          </p:style>
+        </p:cxnSp>
+        <p:cxnSp>
+          <p:nvCxnSpPr>
+            <p:cNvPr id="38" name="Straight Connector 37">
+              <a:extLst>
+                <a:ext uri="{FF2B5EF4-FFF2-40B4-BE49-F238E27FC236}">
+                  <a16:creationId xmlns:a16="http://schemas.microsoft.com/office/drawing/2014/main" id="{48F3FF9F-5224-4AF9-2432-41517F9027B9}"/>
+                </a:ext>
+              </a:extLst>
+            </p:cNvPr>
+            <p:cNvCxnSpPr>
+              <a:cxnSpLocks/>
+            </p:cNvCxnSpPr>
+            <p:nvPr/>
+          </p:nvCxnSpPr>
+          <p:spPr>
+            <a:xfrm flipV="1">
+              <a:off x="4714205" y="3044505"/>
+              <a:ext cx="3329149" cy="1479966"/>
+            </a:xfrm>
+            <a:prstGeom prst="bentConnector3">
+              <a:avLst>
+                <a:gd name="adj1" fmla="val 50000"/>
+              </a:avLst>
+            </a:prstGeom>
+            <a:ln w="38100">
+              <a:solidFill>
+                <a:schemeClr val="tx1"/>
+              </a:solidFill>
+            </a:ln>
+          </p:spPr>
+          <p:style>
+            <a:lnRef idx="1">
+              <a:schemeClr val="dk1"/>
+            </a:lnRef>
+            <a:fillRef idx="0">
+              <a:schemeClr val="dk1"/>
+            </a:fillRef>
+            <a:effectRef idx="0">
+              <a:schemeClr val="dk1"/>
+            </a:effectRef>
+            <a:fontRef idx="minor">
+              <a:schemeClr val="tx1"/>
+            </a:fontRef>
+          </p:style>
+        </p:cxnSp>
+        <p:pic>
+          <p:nvPicPr>
+            <p:cNvPr id="42" name="Picture 41">
+              <a:extLst>
+                <a:ext uri="{FF2B5EF4-FFF2-40B4-BE49-F238E27FC236}">
+                  <a16:creationId xmlns:a16="http://schemas.microsoft.com/office/drawing/2014/main" id="{FF265E18-AF42-CF0A-9A16-EBC370169614}"/>
+                </a:ext>
+              </a:extLst>
+            </p:cNvPr>
+            <p:cNvPicPr>
+              <a:picLocks noChangeAspect="1"/>
+            </p:cNvPicPr>
+            <p:nvPr/>
+          </p:nvPicPr>
+          <p:blipFill>
+            <a:blip r:embed="rId6">
+              <a:extLst>
+                <a:ext uri="{28A0092B-C50C-407E-A947-70E740481C1C}">
+                  <a14:useLocalDpi xmlns:a14="http://schemas.microsoft.com/office/drawing/2010/main" val="0"/>
+                </a:ext>
+              </a:extLst>
+            </a:blip>
+            <a:srcRect l="27792" t="20693" r="28034" b="28320"/>
+            <a:stretch/>
+          </p:blipFill>
+          <p:spPr>
+            <a:xfrm>
+              <a:off x="2716291" y="2020882"/>
+              <a:ext cx="502339" cy="659613"/>
+            </a:xfrm>
+            <a:prstGeom prst="rect">
+              <a:avLst/>
+            </a:prstGeom>
+          </p:spPr>
+        </p:pic>
+        <p:pic>
+          <p:nvPicPr>
+            <p:cNvPr id="47" name="Picture 46">
+              <a:extLst>
+                <a:ext uri="{FF2B5EF4-FFF2-40B4-BE49-F238E27FC236}">
+                  <a16:creationId xmlns:a16="http://schemas.microsoft.com/office/drawing/2014/main" id="{00DEF237-BEC1-BD23-3846-1C73993041DB}"/>
+                </a:ext>
+              </a:extLst>
+            </p:cNvPr>
+            <p:cNvPicPr>
+              <a:picLocks noChangeAspect="1"/>
+            </p:cNvPicPr>
+            <p:nvPr/>
+          </p:nvPicPr>
+          <p:blipFill>
+            <a:blip r:embed="rId6">
+              <a:extLst>
+                <a:ext uri="{28A0092B-C50C-407E-A947-70E740481C1C}">
+                  <a14:useLocalDpi xmlns:a14="http://schemas.microsoft.com/office/drawing/2010/main" val="0"/>
+                </a:ext>
+              </a:extLst>
+            </a:blip>
+            <a:srcRect l="27792" t="20693" r="28034" b="28320"/>
+            <a:stretch/>
+          </p:blipFill>
+          <p:spPr>
+            <a:xfrm>
+              <a:off x="8940857" y="6463782"/>
+              <a:ext cx="417745" cy="413728"/>
+            </a:xfrm>
+            <a:prstGeom prst="rect">
+              <a:avLst/>
+            </a:prstGeom>
+          </p:spPr>
+        </p:pic>
+        <p:cxnSp>
+          <p:nvCxnSpPr>
+            <p:cNvPr id="48" name="Straight Connector 47">
+              <a:extLst>
+                <a:ext uri="{FF2B5EF4-FFF2-40B4-BE49-F238E27FC236}">
+                  <a16:creationId xmlns:a16="http://schemas.microsoft.com/office/drawing/2014/main" id="{139920C4-5308-CC8A-9E50-4430E939655B}"/>
+                </a:ext>
+              </a:extLst>
+            </p:cNvPr>
+            <p:cNvCxnSpPr>
+              <a:cxnSpLocks/>
+              <a:endCxn id="42" idx="0"/>
+            </p:cNvCxnSpPr>
+            <p:nvPr/>
+          </p:nvCxnSpPr>
+          <p:spPr>
+            <a:xfrm>
+              <a:off x="2736266" y="2020882"/>
+              <a:ext cx="231195" cy="0"/>
+            </a:xfrm>
+            <a:prstGeom prst="line">
+              <a:avLst/>
+            </a:prstGeom>
+            <a:ln w="38100">
+              <a:solidFill>
+                <a:schemeClr val="tx1"/>
+              </a:solidFill>
+            </a:ln>
+          </p:spPr>
+          <p:style>
+            <a:lnRef idx="1">
+              <a:schemeClr val="dk1"/>
+            </a:lnRef>
+            <a:fillRef idx="0">
+              <a:schemeClr val="dk1"/>
+            </a:fillRef>
+            <a:effectRef idx="0">
+              <a:schemeClr val="dk1"/>
+            </a:effectRef>
+            <a:fontRef idx="minor">
+              <a:schemeClr val="tx1"/>
+            </a:fontRef>
+          </p:style>
+        </p:cxnSp>
+        <p:sp>
+          <p:nvSpPr>
+            <p:cNvPr id="51" name="Oval 50">
+              <a:extLst>
+                <a:ext uri="{FF2B5EF4-FFF2-40B4-BE49-F238E27FC236}">
+                  <a16:creationId xmlns:a16="http://schemas.microsoft.com/office/drawing/2014/main" id="{1C425718-13FA-14EB-D0B0-4C064502B5F9}"/>
+                </a:ext>
+              </a:extLst>
+            </p:cNvPr>
+            <p:cNvSpPr/>
+            <p:nvPr/>
+          </p:nvSpPr>
+          <p:spPr>
+            <a:xfrm>
+              <a:off x="7963952" y="5560114"/>
+              <a:ext cx="79402" cy="94968"/>
+            </a:xfrm>
+            <a:prstGeom prst="ellipse">
+              <a:avLst/>
+            </a:prstGeom>
+          </p:spPr>
+          <p:style>
+            <a:lnRef idx="2">
+              <a:schemeClr val="dk1">
+                <a:shade val="15000"/>
+              </a:schemeClr>
+            </a:lnRef>
+            <a:fillRef idx="1">
+              <a:schemeClr val="dk1"/>
+            </a:fillRef>
+            <a:effectRef idx="0">
+              <a:schemeClr val="dk1"/>
+            </a:effectRef>
+            <a:fontRef idx="minor">
+              <a:schemeClr val="lt1"/>
+            </a:fontRef>
+          </p:style>
+          <p:txBody>
+            <a:bodyPr rtlCol="0" anchor="ctr"/>
+            <a:lstStyle/>
+            <a:p>
+              <a:pPr algn="ctr"/>
+              <a:endParaRPr lang="en-US" u="sng" dirty="0"/>
+            </a:p>
+          </p:txBody>
+        </p:sp>
+        <p:sp>
+          <p:nvSpPr>
+            <p:cNvPr id="53" name="Oval 52">
+              <a:extLst>
+                <a:ext uri="{FF2B5EF4-FFF2-40B4-BE49-F238E27FC236}">
+                  <a16:creationId xmlns:a16="http://schemas.microsoft.com/office/drawing/2014/main" id="{2EF047DA-A78D-D175-E42A-85EF4DBBBBEF}"/>
+                </a:ext>
+              </a:extLst>
+            </p:cNvPr>
+            <p:cNvSpPr/>
+            <p:nvPr/>
+          </p:nvSpPr>
+          <p:spPr>
+            <a:xfrm>
+              <a:off x="4700113" y="4460831"/>
+              <a:ext cx="79402" cy="94968"/>
+            </a:xfrm>
+            <a:prstGeom prst="ellipse">
+              <a:avLst/>
+            </a:prstGeom>
+          </p:spPr>
+          <p:style>
+            <a:lnRef idx="2">
+              <a:schemeClr val="dk1">
+                <a:shade val="15000"/>
+              </a:schemeClr>
+            </a:lnRef>
+            <a:fillRef idx="1">
+              <a:schemeClr val="dk1"/>
+            </a:fillRef>
+            <a:effectRef idx="0">
+              <a:schemeClr val="dk1"/>
+            </a:effectRef>
+            <a:fontRef idx="minor">
+              <a:schemeClr val="lt1"/>
+            </a:fontRef>
+          </p:style>
+          <p:txBody>
+            <a:bodyPr rtlCol="0" anchor="ctr"/>
+            <a:lstStyle/>
+            <a:p>
+              <a:pPr algn="ctr"/>
+              <a:endParaRPr lang="en-US" u="sng"/>
+            </a:p>
+          </p:txBody>
+        </p:sp>
+        <p:sp>
+          <p:nvSpPr>
+            <p:cNvPr id="54" name="Oval 53">
+              <a:extLst>
+                <a:ext uri="{FF2B5EF4-FFF2-40B4-BE49-F238E27FC236}">
+                  <a16:creationId xmlns:a16="http://schemas.microsoft.com/office/drawing/2014/main" id="{D6BF4F31-6575-3DCB-997C-F246C8C29292}"/>
+                </a:ext>
+              </a:extLst>
+            </p:cNvPr>
+            <p:cNvSpPr/>
+            <p:nvPr/>
+          </p:nvSpPr>
+          <p:spPr>
+            <a:xfrm>
+              <a:off x="4686021" y="3400253"/>
+              <a:ext cx="79402" cy="94968"/>
+            </a:xfrm>
+            <a:prstGeom prst="ellipse">
+              <a:avLst/>
+            </a:prstGeom>
+          </p:spPr>
+          <p:style>
+            <a:lnRef idx="2">
+              <a:schemeClr val="dk1">
+                <a:shade val="15000"/>
+              </a:schemeClr>
+            </a:lnRef>
+            <a:fillRef idx="1">
+              <a:schemeClr val="dk1"/>
+            </a:fillRef>
+            <a:effectRef idx="0">
+              <a:schemeClr val="dk1"/>
+            </a:effectRef>
+            <a:fontRef idx="minor">
+              <a:schemeClr val="lt1"/>
+            </a:fontRef>
+          </p:style>
+          <p:txBody>
+            <a:bodyPr rtlCol="0" anchor="ctr"/>
+            <a:lstStyle/>
+            <a:p>
+              <a:pPr algn="ctr"/>
+              <a:endParaRPr lang="en-US" u="sng" dirty="0"/>
+            </a:p>
+          </p:txBody>
+        </p:sp>
+        <p:sp>
+          <p:nvSpPr>
+            <p:cNvPr id="55" name="Oval 54">
+              <a:extLst>
+                <a:ext uri="{FF2B5EF4-FFF2-40B4-BE49-F238E27FC236}">
+                  <a16:creationId xmlns:a16="http://schemas.microsoft.com/office/drawing/2014/main" id="{A52525FF-F4EF-B942-271D-C728D27E20E4}"/>
+                </a:ext>
+              </a:extLst>
+            </p:cNvPr>
+            <p:cNvSpPr/>
+            <p:nvPr/>
+          </p:nvSpPr>
+          <p:spPr>
+            <a:xfrm>
+              <a:off x="4340805" y="1546108"/>
+              <a:ext cx="79402" cy="94968"/>
+            </a:xfrm>
+            <a:prstGeom prst="ellipse">
+              <a:avLst/>
+            </a:prstGeom>
+          </p:spPr>
+          <p:style>
+            <a:lnRef idx="2">
+              <a:schemeClr val="dk1">
+                <a:shade val="15000"/>
+              </a:schemeClr>
+            </a:lnRef>
+            <a:fillRef idx="1">
+              <a:schemeClr val="dk1"/>
+            </a:fillRef>
+            <a:effectRef idx="0">
+              <a:schemeClr val="dk1"/>
+            </a:effectRef>
+            <a:fontRef idx="minor">
+              <a:schemeClr val="lt1"/>
+            </a:fontRef>
+          </p:style>
+          <p:txBody>
+            <a:bodyPr rtlCol="0" anchor="ctr"/>
+            <a:lstStyle/>
+            <a:p>
+              <a:pPr algn="ctr"/>
+              <a:endParaRPr lang="en-US" u="sng"/>
+            </a:p>
+          </p:txBody>
+        </p:sp>
+        <p:pic>
+          <p:nvPicPr>
+            <p:cNvPr id="2" name="Picture 1">
+              <a:extLst>
+                <a:ext uri="{FF2B5EF4-FFF2-40B4-BE49-F238E27FC236}">
+                  <a16:creationId xmlns:a16="http://schemas.microsoft.com/office/drawing/2014/main" id="{0C25B445-6496-C57D-79EE-D976DC3B4514}"/>
+                </a:ext>
+              </a:extLst>
+            </p:cNvPr>
+            <p:cNvPicPr>
+              <a:picLocks noChangeAspect="1"/>
+            </p:cNvPicPr>
+            <p:nvPr/>
+          </p:nvPicPr>
+          <p:blipFill>
+            <a:blip r:embed="rId3">
+              <a:extLst>
+                <a:ext uri="{28A0092B-C50C-407E-A947-70E740481C1C}">
+                  <a14:useLocalDpi xmlns:a14="http://schemas.microsoft.com/office/drawing/2010/main" val="0"/>
+                </a:ext>
+              </a:extLst>
+            </a:blip>
+            <a:srcRect l="17856" r="17722"/>
+            <a:stretch/>
+          </p:blipFill>
+          <p:spPr>
+            <a:xfrm>
+              <a:off x="7238666" y="1529933"/>
+              <a:ext cx="1193968" cy="2226023"/>
+            </a:xfrm>
+            <a:prstGeom prst="rect">
+              <a:avLst/>
+            </a:prstGeom>
+          </p:spPr>
+        </p:pic>
+        <p:pic>
+          <p:nvPicPr>
+            <p:cNvPr id="5" name="Picture 4">
+              <a:extLst>
+                <a:ext uri="{FF2B5EF4-FFF2-40B4-BE49-F238E27FC236}">
+                  <a16:creationId xmlns:a16="http://schemas.microsoft.com/office/drawing/2014/main" id="{8BC582BF-B346-12C3-096A-16175FFCB0AC}"/>
+                </a:ext>
+              </a:extLst>
+            </p:cNvPr>
+            <p:cNvPicPr>
+              <a:picLocks noChangeAspect="1"/>
+            </p:cNvPicPr>
+            <p:nvPr/>
+          </p:nvPicPr>
+          <p:blipFill>
+            <a:blip r:embed="rId2">
+              <a:extLst>
+                <a:ext uri="{28A0092B-C50C-407E-A947-70E740481C1C}">
+                  <a14:useLocalDpi xmlns:a14="http://schemas.microsoft.com/office/drawing/2010/main" val="0"/>
+                </a:ext>
+              </a:extLst>
+            </a:blip>
+            <a:srcRect t="36811" b="36590"/>
+            <a:stretch/>
+          </p:blipFill>
+          <p:spPr>
+            <a:xfrm rot="5400000" flipV="1">
+              <a:off x="3180279" y="3949360"/>
+              <a:ext cx="1075964" cy="127689"/>
+            </a:xfrm>
+            <a:prstGeom prst="rect">
+              <a:avLst/>
+            </a:prstGeom>
+          </p:spPr>
+        </p:pic>
+        <p:pic>
+          <p:nvPicPr>
+            <p:cNvPr id="6" name="Picture 5">
+              <a:extLst>
+                <a:ext uri="{FF2B5EF4-FFF2-40B4-BE49-F238E27FC236}">
+                  <a16:creationId xmlns:a16="http://schemas.microsoft.com/office/drawing/2014/main" id="{330B1D03-D005-67DB-0B3A-944EF626105F}"/>
+                </a:ext>
+              </a:extLst>
+            </p:cNvPr>
+            <p:cNvPicPr>
+              <a:picLocks noChangeAspect="1"/>
+            </p:cNvPicPr>
+            <p:nvPr/>
+          </p:nvPicPr>
+          <p:blipFill>
+            <a:blip r:embed="rId7">
+              <a:extLst>
+                <a:ext uri="{28A0092B-C50C-407E-A947-70E740481C1C}">
+                  <a14:useLocalDpi xmlns:a14="http://schemas.microsoft.com/office/drawing/2010/main" val="0"/>
+                </a:ext>
+              </a:extLst>
+            </a:blip>
+            <a:srcRect l="14886" r="22425" b="8348"/>
+            <a:stretch/>
+          </p:blipFill>
+          <p:spPr>
+            <a:xfrm>
+              <a:off x="3446168" y="2195666"/>
+              <a:ext cx="763668" cy="933953"/>
+            </a:xfrm>
+            <a:prstGeom prst="rect">
+              <a:avLst/>
+            </a:prstGeom>
+          </p:spPr>
+        </p:pic>
+        <p:cxnSp>
+          <p:nvCxnSpPr>
+            <p:cNvPr id="7" name="Straight Connector 6">
+              <a:extLst>
+                <a:ext uri="{FF2B5EF4-FFF2-40B4-BE49-F238E27FC236}">
+                  <a16:creationId xmlns:a16="http://schemas.microsoft.com/office/drawing/2014/main" id="{97535055-7B46-62E5-AA66-AB593065B46D}"/>
+                </a:ext>
+              </a:extLst>
+            </p:cNvPr>
+            <p:cNvCxnSpPr>
+              <a:cxnSpLocks/>
+            </p:cNvCxnSpPr>
+            <p:nvPr/>
+          </p:nvCxnSpPr>
+          <p:spPr>
+            <a:xfrm>
+              <a:off x="3704169" y="3023242"/>
+              <a:ext cx="0" cy="451980"/>
+            </a:xfrm>
+            <a:prstGeom prst="line">
+              <a:avLst/>
+            </a:prstGeom>
+            <a:ln w="38100">
+              <a:solidFill>
+                <a:schemeClr val="tx1"/>
+              </a:solidFill>
+            </a:ln>
+          </p:spPr>
+          <p:style>
+            <a:lnRef idx="1">
+              <a:schemeClr val="dk1"/>
+            </a:lnRef>
+            <a:fillRef idx="0">
+              <a:schemeClr val="dk1"/>
+            </a:fillRef>
+            <a:effectRef idx="0">
+              <a:schemeClr val="dk1"/>
+            </a:effectRef>
+            <a:fontRef idx="minor">
+              <a:schemeClr val="tx1"/>
+            </a:fontRef>
+          </p:style>
+        </p:cxnSp>
+        <p:sp>
+          <p:nvSpPr>
+            <p:cNvPr id="9" name="Oval 8">
+              <a:extLst>
+                <a:ext uri="{FF2B5EF4-FFF2-40B4-BE49-F238E27FC236}">
+                  <a16:creationId xmlns:a16="http://schemas.microsoft.com/office/drawing/2014/main" id="{045268C9-03D6-1F04-16B7-049823DE7EFB}"/>
+                </a:ext>
+              </a:extLst>
+            </p:cNvPr>
+            <p:cNvSpPr/>
+            <p:nvPr/>
+          </p:nvSpPr>
+          <p:spPr>
+            <a:xfrm>
+              <a:off x="3678560" y="4461788"/>
+              <a:ext cx="79402" cy="94968"/>
+            </a:xfrm>
+            <a:prstGeom prst="ellipse">
+              <a:avLst/>
+            </a:prstGeom>
+          </p:spPr>
+          <p:style>
+            <a:lnRef idx="2">
+              <a:schemeClr val="dk1">
+                <a:shade val="15000"/>
+              </a:schemeClr>
+            </a:lnRef>
+            <a:fillRef idx="1">
+              <a:schemeClr val="dk1"/>
+            </a:fillRef>
+            <a:effectRef idx="0">
+              <a:schemeClr val="dk1"/>
+            </a:effectRef>
+            <a:fontRef idx="minor">
+              <a:schemeClr val="lt1"/>
+            </a:fontRef>
+          </p:style>
+          <p:txBody>
+            <a:bodyPr rtlCol="0" anchor="ctr"/>
+            <a:lstStyle/>
+            <a:p>
+              <a:pPr algn="ctr"/>
+              <a:endParaRPr lang="en-US" u="sng"/>
+            </a:p>
+          </p:txBody>
+        </p:sp>
+        <p:sp>
+          <p:nvSpPr>
+            <p:cNvPr id="11" name="Oval 10">
+              <a:extLst>
+                <a:ext uri="{FF2B5EF4-FFF2-40B4-BE49-F238E27FC236}">
+                  <a16:creationId xmlns:a16="http://schemas.microsoft.com/office/drawing/2014/main" id="{FA13407A-572F-0206-AFF9-0ECF5F0E28AA}"/>
+                </a:ext>
+              </a:extLst>
+            </p:cNvPr>
+            <p:cNvSpPr/>
+            <p:nvPr/>
+          </p:nvSpPr>
+          <p:spPr>
+            <a:xfrm>
+              <a:off x="3664468" y="3401210"/>
+              <a:ext cx="79402" cy="94968"/>
+            </a:xfrm>
+            <a:prstGeom prst="ellipse">
+              <a:avLst/>
+            </a:prstGeom>
+          </p:spPr>
+          <p:style>
+            <a:lnRef idx="2">
+              <a:schemeClr val="dk1">
+                <a:shade val="15000"/>
+              </a:schemeClr>
+            </a:lnRef>
+            <a:fillRef idx="1">
+              <a:schemeClr val="dk1"/>
+            </a:fillRef>
+            <a:effectRef idx="0">
+              <a:schemeClr val="dk1"/>
+            </a:effectRef>
+            <a:fontRef idx="minor">
+              <a:schemeClr val="lt1"/>
+            </a:fontRef>
+          </p:style>
+          <p:txBody>
+            <a:bodyPr rtlCol="0" anchor="ctr"/>
+            <a:lstStyle/>
+            <a:p>
+              <a:pPr algn="ctr"/>
+              <a:endParaRPr lang="en-US" u="sng" dirty="0"/>
+            </a:p>
+          </p:txBody>
+        </p:sp>
+        <p:sp>
+          <p:nvSpPr>
+            <p:cNvPr id="13" name="Oval 12">
+              <a:extLst>
+                <a:ext uri="{FF2B5EF4-FFF2-40B4-BE49-F238E27FC236}">
+                  <a16:creationId xmlns:a16="http://schemas.microsoft.com/office/drawing/2014/main" id="{DA71495A-0D92-1E1D-DE08-0C4A291C7E95}"/>
+                </a:ext>
+              </a:extLst>
+            </p:cNvPr>
+            <p:cNvSpPr/>
+            <p:nvPr/>
+          </p:nvSpPr>
+          <p:spPr>
+            <a:xfrm flipH="1">
+              <a:off x="3657116" y="3008705"/>
+              <a:ext cx="86754" cy="94049"/>
+            </a:xfrm>
+            <a:prstGeom prst="ellipse">
+              <a:avLst/>
+            </a:prstGeom>
+          </p:spPr>
+          <p:style>
+            <a:lnRef idx="2">
+              <a:schemeClr val="dk1">
+                <a:shade val="15000"/>
+              </a:schemeClr>
+            </a:lnRef>
+            <a:fillRef idx="1">
+              <a:schemeClr val="dk1"/>
+            </a:fillRef>
+            <a:effectRef idx="0">
+              <a:schemeClr val="dk1"/>
+            </a:effectRef>
+            <a:fontRef idx="minor">
+              <a:schemeClr val="lt1"/>
+            </a:fontRef>
+          </p:style>
+          <p:txBody>
+            <a:bodyPr rtlCol="0" anchor="ctr"/>
+            <a:lstStyle/>
+            <a:p>
+              <a:pPr algn="ctr"/>
+              <a:endParaRPr lang="en-US" dirty="0"/>
+            </a:p>
+          </p:txBody>
+        </p:sp>
+        <p:sp>
+          <p:nvSpPr>
+            <p:cNvPr id="21" name="Oval 20">
+              <a:extLst>
+                <a:ext uri="{FF2B5EF4-FFF2-40B4-BE49-F238E27FC236}">
+                  <a16:creationId xmlns:a16="http://schemas.microsoft.com/office/drawing/2014/main" id="{22CB1F49-C71B-AEF3-5749-30AFE47FC8DB}"/>
+                </a:ext>
+              </a:extLst>
+            </p:cNvPr>
+            <p:cNvSpPr/>
+            <p:nvPr/>
+          </p:nvSpPr>
+          <p:spPr>
+            <a:xfrm>
+              <a:off x="2928161" y="1973397"/>
+              <a:ext cx="79402" cy="94968"/>
+            </a:xfrm>
+            <a:prstGeom prst="ellipse">
+              <a:avLst/>
+            </a:prstGeom>
+          </p:spPr>
+          <p:style>
+            <a:lnRef idx="2">
+              <a:schemeClr val="dk1">
+                <a:shade val="15000"/>
+              </a:schemeClr>
+            </a:lnRef>
+            <a:fillRef idx="1">
+              <a:schemeClr val="dk1"/>
+            </a:fillRef>
+            <a:effectRef idx="0">
+              <a:schemeClr val="dk1"/>
+            </a:effectRef>
+            <a:fontRef idx="minor">
+              <a:schemeClr val="lt1"/>
+            </a:fontRef>
+          </p:style>
+          <p:txBody>
+            <a:bodyPr rtlCol="0" anchor="ctr"/>
+            <a:lstStyle/>
+            <a:p>
+              <a:pPr algn="ctr"/>
+              <a:endParaRPr lang="en-US" u="sng"/>
+            </a:p>
+          </p:txBody>
+        </p:sp>
+        <p:cxnSp>
+          <p:nvCxnSpPr>
+            <p:cNvPr id="24" name="Straight Connector 23">
+              <a:extLst>
+                <a:ext uri="{FF2B5EF4-FFF2-40B4-BE49-F238E27FC236}">
+                  <a16:creationId xmlns:a16="http://schemas.microsoft.com/office/drawing/2014/main" id="{C7BC7A3F-AD5A-80C5-9C6D-BC5CDD975FF3}"/>
+                </a:ext>
+              </a:extLst>
+            </p:cNvPr>
+            <p:cNvCxnSpPr>
+              <a:cxnSpLocks/>
+            </p:cNvCxnSpPr>
+            <p:nvPr/>
+          </p:nvCxnSpPr>
+          <p:spPr>
+            <a:xfrm>
+              <a:off x="3834954" y="2986484"/>
+              <a:ext cx="1011702" cy="0"/>
+            </a:xfrm>
+            <a:prstGeom prst="line">
+              <a:avLst/>
+            </a:prstGeom>
+            <a:ln w="38100">
+              <a:solidFill>
+                <a:schemeClr val="tx1"/>
+              </a:solidFill>
+            </a:ln>
+          </p:spPr>
+          <p:style>
+            <a:lnRef idx="1">
+              <a:schemeClr val="dk1"/>
+            </a:lnRef>
+            <a:fillRef idx="0">
+              <a:schemeClr val="dk1"/>
+            </a:fillRef>
+            <a:effectRef idx="0">
+              <a:schemeClr val="dk1"/>
+            </a:effectRef>
+            <a:fontRef idx="minor">
+              <a:schemeClr val="tx1"/>
+            </a:fontRef>
+          </p:style>
+        </p:cxnSp>
+        <p:pic>
+          <p:nvPicPr>
+            <p:cNvPr id="15" name="Picture 14">
+              <a:extLst>
+                <a:ext uri="{FF2B5EF4-FFF2-40B4-BE49-F238E27FC236}">
+                  <a16:creationId xmlns:a16="http://schemas.microsoft.com/office/drawing/2014/main" id="{3651DF2F-1349-13D4-DC37-2E6BC492970A}"/>
+                </a:ext>
+              </a:extLst>
+            </p:cNvPr>
+            <p:cNvPicPr>
+              <a:picLocks noChangeAspect="1"/>
+            </p:cNvPicPr>
+            <p:nvPr/>
+          </p:nvPicPr>
+          <p:blipFill>
+            <a:blip r:embed="rId7">
+              <a:extLst>
+                <a:ext uri="{28A0092B-C50C-407E-A947-70E740481C1C}">
+                  <a14:useLocalDpi xmlns:a14="http://schemas.microsoft.com/office/drawing/2010/main" val="0"/>
+                </a:ext>
+              </a:extLst>
+            </a:blip>
+            <a:srcRect l="14886" r="22425" b="8348"/>
+            <a:stretch/>
+          </p:blipFill>
+          <p:spPr>
+            <a:xfrm>
+              <a:off x="4457617" y="2184231"/>
+              <a:ext cx="763668" cy="933953"/>
+            </a:xfrm>
+            <a:prstGeom prst="rect">
+              <a:avLst/>
+            </a:prstGeom>
+          </p:spPr>
+        </p:pic>
+        <p:cxnSp>
+          <p:nvCxnSpPr>
+            <p:cNvPr id="28" name="Straight Connector 27">
+              <a:extLst>
+                <a:ext uri="{FF2B5EF4-FFF2-40B4-BE49-F238E27FC236}">
+                  <a16:creationId xmlns:a16="http://schemas.microsoft.com/office/drawing/2014/main" id="{24AD13E7-691C-C7AE-3C67-1543D9519E9E}"/>
+                </a:ext>
+              </a:extLst>
+            </p:cNvPr>
+            <p:cNvCxnSpPr>
+              <a:cxnSpLocks/>
+            </p:cNvCxnSpPr>
+            <p:nvPr/>
+          </p:nvCxnSpPr>
+          <p:spPr>
+            <a:xfrm>
+              <a:off x="4725722" y="3022285"/>
+              <a:ext cx="0" cy="451980"/>
+            </a:xfrm>
+            <a:prstGeom prst="line">
+              <a:avLst/>
+            </a:prstGeom>
+            <a:ln w="38100">
+              <a:solidFill>
+                <a:schemeClr val="tx1"/>
+              </a:solidFill>
+            </a:ln>
+          </p:spPr>
+          <p:style>
+            <a:lnRef idx="1">
+              <a:schemeClr val="dk1"/>
+            </a:lnRef>
+            <a:fillRef idx="0">
+              <a:schemeClr val="dk1"/>
+            </a:fillRef>
+            <a:effectRef idx="0">
+              <a:schemeClr val="dk1"/>
+            </a:effectRef>
+            <a:fontRef idx="minor">
+              <a:schemeClr val="tx1"/>
+            </a:fontRef>
+          </p:style>
+        </p:cxnSp>
+        <p:sp>
+          <p:nvSpPr>
+            <p:cNvPr id="29" name="Oval 28">
+              <a:extLst>
+                <a:ext uri="{FF2B5EF4-FFF2-40B4-BE49-F238E27FC236}">
+                  <a16:creationId xmlns:a16="http://schemas.microsoft.com/office/drawing/2014/main" id="{391106D7-DE9E-BD13-B7A5-A4711A8AF66F}"/>
+                </a:ext>
+              </a:extLst>
+            </p:cNvPr>
+            <p:cNvSpPr/>
+            <p:nvPr/>
+          </p:nvSpPr>
+          <p:spPr>
+            <a:xfrm>
+              <a:off x="4826678" y="2949080"/>
+              <a:ext cx="52260" cy="59625"/>
+            </a:xfrm>
+            <a:prstGeom prst="ellipse">
+              <a:avLst/>
+            </a:prstGeom>
+          </p:spPr>
+          <p:style>
+            <a:lnRef idx="2">
+              <a:schemeClr val="dk1">
+                <a:shade val="15000"/>
+              </a:schemeClr>
+            </a:lnRef>
+            <a:fillRef idx="1">
+              <a:schemeClr val="dk1"/>
+            </a:fillRef>
+            <a:effectRef idx="0">
+              <a:schemeClr val="dk1"/>
+            </a:effectRef>
+            <a:fontRef idx="minor">
+              <a:schemeClr val="lt1"/>
+            </a:fontRef>
+          </p:style>
+          <p:txBody>
+            <a:bodyPr rtlCol="0" anchor="ctr"/>
+            <a:lstStyle/>
+            <a:p>
+              <a:pPr algn="ctr"/>
+              <a:endParaRPr lang="en-US" dirty="0"/>
+            </a:p>
+          </p:txBody>
+        </p:sp>
+        <p:sp>
+          <p:nvSpPr>
+            <p:cNvPr id="30" name="Oval 29">
+              <a:extLst>
+                <a:ext uri="{FF2B5EF4-FFF2-40B4-BE49-F238E27FC236}">
+                  <a16:creationId xmlns:a16="http://schemas.microsoft.com/office/drawing/2014/main" id="{47E20F60-DC66-030D-EAA7-278F7D513390}"/>
+                </a:ext>
+              </a:extLst>
+            </p:cNvPr>
+            <p:cNvSpPr/>
+            <p:nvPr/>
+          </p:nvSpPr>
+          <p:spPr>
+            <a:xfrm>
+              <a:off x="4700113" y="2986484"/>
+              <a:ext cx="52260" cy="59625"/>
+            </a:xfrm>
+            <a:prstGeom prst="ellipse">
+              <a:avLst/>
+            </a:prstGeom>
+          </p:spPr>
+          <p:style>
+            <a:lnRef idx="2">
+              <a:schemeClr val="dk1">
+                <a:shade val="15000"/>
+              </a:schemeClr>
+            </a:lnRef>
+            <a:fillRef idx="1">
+              <a:schemeClr val="dk1"/>
+            </a:fillRef>
+            <a:effectRef idx="0">
+              <a:schemeClr val="dk1"/>
+            </a:effectRef>
+            <a:fontRef idx="minor">
+              <a:schemeClr val="lt1"/>
+            </a:fontRef>
+          </p:style>
+          <p:txBody>
+            <a:bodyPr rtlCol="0" anchor="ctr"/>
+            <a:lstStyle/>
+            <a:p>
+              <a:pPr algn="ctr"/>
+              <a:endParaRPr lang="en-US" dirty="0"/>
+            </a:p>
+          </p:txBody>
+        </p:sp>
+        <p:sp>
+          <p:nvSpPr>
+            <p:cNvPr id="31" name="Oval 30">
+              <a:extLst>
+                <a:ext uri="{FF2B5EF4-FFF2-40B4-BE49-F238E27FC236}">
+                  <a16:creationId xmlns:a16="http://schemas.microsoft.com/office/drawing/2014/main" id="{7A3336AE-6C58-5090-4688-DE8FCE1A5BED}"/>
+                </a:ext>
+              </a:extLst>
+            </p:cNvPr>
+            <p:cNvSpPr/>
+            <p:nvPr/>
+          </p:nvSpPr>
+          <p:spPr>
+            <a:xfrm>
+              <a:off x="3808824" y="2960494"/>
+              <a:ext cx="52260" cy="59625"/>
+            </a:xfrm>
+            <a:prstGeom prst="ellipse">
+              <a:avLst/>
+            </a:prstGeom>
+          </p:spPr>
+          <p:style>
+            <a:lnRef idx="2">
+              <a:schemeClr val="dk1">
+                <a:shade val="15000"/>
+              </a:schemeClr>
+            </a:lnRef>
+            <a:fillRef idx="1">
+              <a:schemeClr val="dk1"/>
+            </a:fillRef>
+            <a:effectRef idx="0">
+              <a:schemeClr val="dk1"/>
+            </a:effectRef>
+            <a:fontRef idx="minor">
+              <a:schemeClr val="lt1"/>
+            </a:fontRef>
+          </p:style>
+          <p:txBody>
+            <a:bodyPr rtlCol="0" anchor="ctr"/>
+            <a:lstStyle/>
+            <a:p>
+              <a:pPr algn="ctr"/>
+              <a:endParaRPr lang="en-US" dirty="0"/>
+            </a:p>
+          </p:txBody>
+        </p:sp>
+        <p:cxnSp>
+          <p:nvCxnSpPr>
+            <p:cNvPr id="37" name="Straight Connector 37">
+              <a:extLst>
+                <a:ext uri="{FF2B5EF4-FFF2-40B4-BE49-F238E27FC236}">
+                  <a16:creationId xmlns:a16="http://schemas.microsoft.com/office/drawing/2014/main" id="{B2406DE9-4FDF-B4EE-C2B3-6C061E508E7B}"/>
+                </a:ext>
+              </a:extLst>
+            </p:cNvPr>
+            <p:cNvCxnSpPr>
+              <a:cxnSpLocks/>
+            </p:cNvCxnSpPr>
+            <p:nvPr/>
+          </p:nvCxnSpPr>
+          <p:spPr>
+            <a:xfrm>
+              <a:off x="3691919" y="4525428"/>
+              <a:ext cx="4338077" cy="738978"/>
+            </a:xfrm>
+            <a:prstGeom prst="bentConnector3">
+              <a:avLst>
+                <a:gd name="adj1" fmla="val 17379"/>
+              </a:avLst>
+            </a:prstGeom>
+            <a:ln w="38100">
+              <a:solidFill>
+                <a:schemeClr val="tx1"/>
+              </a:solidFill>
+            </a:ln>
+          </p:spPr>
+          <p:style>
+            <a:lnRef idx="1">
+              <a:schemeClr val="dk1"/>
+            </a:lnRef>
+            <a:fillRef idx="0">
+              <a:schemeClr val="dk1"/>
+            </a:fillRef>
+            <a:effectRef idx="0">
+              <a:schemeClr val="dk1"/>
+            </a:effectRef>
+            <a:fontRef idx="minor">
+              <a:schemeClr val="tx1"/>
+            </a:fontRef>
+          </p:style>
+        </p:cxnSp>
+        <p:sp>
+          <p:nvSpPr>
+            <p:cNvPr id="56" name="Oval 55">
+              <a:extLst>
+                <a:ext uri="{FF2B5EF4-FFF2-40B4-BE49-F238E27FC236}">
+                  <a16:creationId xmlns:a16="http://schemas.microsoft.com/office/drawing/2014/main" id="{909A59CB-D48A-6343-08EC-69B0D6CD5FD9}"/>
+                </a:ext>
+              </a:extLst>
+            </p:cNvPr>
+            <p:cNvSpPr/>
+            <p:nvPr/>
+          </p:nvSpPr>
+          <p:spPr>
+            <a:xfrm>
+              <a:off x="7984474" y="2998625"/>
+              <a:ext cx="79402" cy="94968"/>
+            </a:xfrm>
+            <a:prstGeom prst="ellipse">
+              <a:avLst/>
+            </a:prstGeom>
+          </p:spPr>
+          <p:style>
+            <a:lnRef idx="2">
+              <a:schemeClr val="dk1">
+                <a:shade val="15000"/>
+              </a:schemeClr>
+            </a:lnRef>
+            <a:fillRef idx="1">
+              <a:schemeClr val="dk1"/>
+            </a:fillRef>
+            <a:effectRef idx="0">
+              <a:schemeClr val="dk1"/>
+            </a:effectRef>
+            <a:fontRef idx="minor">
+              <a:schemeClr val="lt1"/>
+            </a:fontRef>
+          </p:style>
+          <p:txBody>
+            <a:bodyPr rtlCol="0" anchor="ctr"/>
+            <a:lstStyle/>
+            <a:p>
+              <a:pPr algn="ctr"/>
+              <a:endParaRPr lang="en-US" u="sng"/>
+            </a:p>
+          </p:txBody>
+        </p:sp>
+        <p:sp>
+          <p:nvSpPr>
+            <p:cNvPr id="46" name="Oval 45">
+              <a:extLst>
+                <a:ext uri="{FF2B5EF4-FFF2-40B4-BE49-F238E27FC236}">
+                  <a16:creationId xmlns:a16="http://schemas.microsoft.com/office/drawing/2014/main" id="{E3F0F3CD-85E3-34FD-F6FE-DCAF35316926}"/>
+                </a:ext>
+              </a:extLst>
+            </p:cNvPr>
+            <p:cNvSpPr/>
+            <p:nvPr/>
+          </p:nvSpPr>
+          <p:spPr>
+            <a:xfrm>
+              <a:off x="7963953" y="5222852"/>
+              <a:ext cx="79402" cy="94968"/>
+            </a:xfrm>
+            <a:prstGeom prst="ellipse">
+              <a:avLst/>
+            </a:prstGeom>
+          </p:spPr>
+          <p:style>
+            <a:lnRef idx="2">
+              <a:schemeClr val="dk1">
+                <a:shade val="15000"/>
+              </a:schemeClr>
+            </a:lnRef>
+            <a:fillRef idx="1">
+              <a:schemeClr val="dk1"/>
+            </a:fillRef>
+            <a:effectRef idx="0">
+              <a:schemeClr val="dk1"/>
+            </a:effectRef>
+            <a:fontRef idx="minor">
+              <a:schemeClr val="lt1"/>
+            </a:fontRef>
+          </p:style>
+          <p:txBody>
+            <a:bodyPr rtlCol="0" anchor="ctr"/>
+            <a:lstStyle/>
+            <a:p>
+              <a:pPr algn="ctr"/>
+              <a:endParaRPr lang="en-US" u="sng"/>
+            </a:p>
+          </p:txBody>
+        </p:sp>
+        <p:pic>
+          <p:nvPicPr>
+            <p:cNvPr id="79" name="Picture 78">
+              <a:extLst>
+                <a:ext uri="{FF2B5EF4-FFF2-40B4-BE49-F238E27FC236}">
+                  <a16:creationId xmlns:a16="http://schemas.microsoft.com/office/drawing/2014/main" id="{C0B9A7D0-C5AA-8A88-8AF8-8B7EB274EB50}"/>
+                </a:ext>
+              </a:extLst>
+            </p:cNvPr>
+            <p:cNvPicPr>
+              <a:picLocks noChangeAspect="1"/>
+            </p:cNvPicPr>
+            <p:nvPr/>
+          </p:nvPicPr>
+          <p:blipFill>
+            <a:blip r:embed="rId2">
+              <a:extLst>
+                <a:ext uri="{28A0092B-C50C-407E-A947-70E740481C1C}">
+                  <a14:useLocalDpi xmlns:a14="http://schemas.microsoft.com/office/drawing/2010/main" val="0"/>
+                </a:ext>
+              </a:extLst>
+            </a:blip>
+            <a:srcRect t="36811" b="36590"/>
+            <a:stretch/>
+          </p:blipFill>
+          <p:spPr>
+            <a:xfrm rot="5400000" flipV="1">
+              <a:off x="8720109" y="5992312"/>
+              <a:ext cx="842909" cy="100031"/>
+            </a:xfrm>
+            <a:prstGeom prst="rect">
+              <a:avLst/>
+            </a:prstGeom>
+          </p:spPr>
+        </p:pic>
+        <p:cxnSp>
+          <p:nvCxnSpPr>
+            <p:cNvPr id="80" name="Straight Connector 37">
+              <a:extLst>
+                <a:ext uri="{FF2B5EF4-FFF2-40B4-BE49-F238E27FC236}">
+                  <a16:creationId xmlns:a16="http://schemas.microsoft.com/office/drawing/2014/main" id="{C49EDC3C-98F5-4526-A9B6-4C8358173A6D}"/>
+                </a:ext>
+              </a:extLst>
+            </p:cNvPr>
+            <p:cNvCxnSpPr>
+              <a:cxnSpLocks/>
+            </p:cNvCxnSpPr>
+            <p:nvPr/>
+          </p:nvCxnSpPr>
+          <p:spPr>
+            <a:xfrm rot="10800000" flipV="1">
+              <a:off x="9149730" y="5655082"/>
+              <a:ext cx="1086501" cy="808700"/>
+            </a:xfrm>
+            <a:prstGeom prst="bentConnector3">
+              <a:avLst>
+                <a:gd name="adj1" fmla="val -2261"/>
+              </a:avLst>
+            </a:prstGeom>
+            <a:ln w="38100">
+              <a:solidFill>
+                <a:schemeClr val="tx1"/>
+              </a:solidFill>
+            </a:ln>
+          </p:spPr>
+          <p:style>
+            <a:lnRef idx="1">
+              <a:schemeClr val="dk1"/>
+            </a:lnRef>
+            <a:fillRef idx="0">
+              <a:schemeClr val="dk1"/>
+            </a:fillRef>
+            <a:effectRef idx="0">
+              <a:schemeClr val="dk1"/>
+            </a:effectRef>
+            <a:fontRef idx="minor">
+              <a:schemeClr val="tx1"/>
+            </a:fontRef>
+          </p:style>
+        </p:cxnSp>
+        <p:sp>
+          <p:nvSpPr>
+            <p:cNvPr id="90" name="Oval 89">
+              <a:extLst>
+                <a:ext uri="{FF2B5EF4-FFF2-40B4-BE49-F238E27FC236}">
+                  <a16:creationId xmlns:a16="http://schemas.microsoft.com/office/drawing/2014/main" id="{AB543802-DA80-8E82-AAE3-4ECF77329486}"/>
+                </a:ext>
+              </a:extLst>
+            </p:cNvPr>
+            <p:cNvSpPr/>
+            <p:nvPr/>
+          </p:nvSpPr>
+          <p:spPr>
+            <a:xfrm>
+              <a:off x="9101862" y="5564396"/>
+              <a:ext cx="79402" cy="94968"/>
+            </a:xfrm>
+            <a:prstGeom prst="ellipse">
+              <a:avLst/>
+            </a:prstGeom>
+          </p:spPr>
+          <p:style>
+            <a:lnRef idx="2">
+              <a:schemeClr val="dk1">
+                <a:shade val="15000"/>
+              </a:schemeClr>
+            </a:lnRef>
+            <a:fillRef idx="1">
+              <a:schemeClr val="dk1"/>
+            </a:fillRef>
+            <a:effectRef idx="0">
+              <a:schemeClr val="dk1"/>
+            </a:effectRef>
+            <a:fontRef idx="minor">
+              <a:schemeClr val="lt1"/>
+            </a:fontRef>
+          </p:style>
+          <p:txBody>
+            <a:bodyPr rtlCol="0" anchor="ctr"/>
+            <a:lstStyle/>
+            <a:p>
+              <a:pPr algn="ctr"/>
+              <a:endParaRPr lang="en-US" u="sng"/>
+            </a:p>
+          </p:txBody>
+        </p:sp>
+        <p:sp>
+          <p:nvSpPr>
+            <p:cNvPr id="92" name="Oval 91">
+              <a:extLst>
+                <a:ext uri="{FF2B5EF4-FFF2-40B4-BE49-F238E27FC236}">
+                  <a16:creationId xmlns:a16="http://schemas.microsoft.com/office/drawing/2014/main" id="{D3C04F59-50E3-0192-3649-6BABCBF0E380}"/>
+                </a:ext>
+              </a:extLst>
+            </p:cNvPr>
+            <p:cNvSpPr/>
+            <p:nvPr/>
+          </p:nvSpPr>
+          <p:spPr>
+            <a:xfrm>
+              <a:off x="9954913" y="5560114"/>
+              <a:ext cx="79402" cy="94968"/>
+            </a:xfrm>
+            <a:prstGeom prst="ellipse">
+              <a:avLst/>
+            </a:prstGeom>
+          </p:spPr>
+          <p:style>
+            <a:lnRef idx="2">
+              <a:schemeClr val="dk1">
+                <a:shade val="15000"/>
+              </a:schemeClr>
+            </a:lnRef>
+            <a:fillRef idx="1">
+              <a:schemeClr val="dk1"/>
+            </a:fillRef>
+            <a:effectRef idx="0">
+              <a:schemeClr val="dk1"/>
+            </a:effectRef>
+            <a:fontRef idx="minor">
+              <a:schemeClr val="lt1"/>
+            </a:fontRef>
+          </p:style>
+          <p:txBody>
+            <a:bodyPr rtlCol="0" anchor="ctr"/>
+            <a:lstStyle/>
+            <a:p>
+              <a:pPr algn="ctr"/>
+              <a:endParaRPr lang="en-US" u="sng"/>
+            </a:p>
+          </p:txBody>
+        </p:sp>
+        <p:sp>
+          <p:nvSpPr>
+            <p:cNvPr id="96" name="Oval 95">
+              <a:extLst>
+                <a:ext uri="{FF2B5EF4-FFF2-40B4-BE49-F238E27FC236}">
+                  <a16:creationId xmlns:a16="http://schemas.microsoft.com/office/drawing/2014/main" id="{A0381ABE-60F5-05CD-2537-90D034057732}"/>
+                </a:ext>
+              </a:extLst>
+            </p:cNvPr>
+            <p:cNvSpPr/>
+            <p:nvPr/>
+          </p:nvSpPr>
+          <p:spPr>
+            <a:xfrm>
+              <a:off x="9112177" y="6423326"/>
+              <a:ext cx="79402" cy="94968"/>
+            </a:xfrm>
+            <a:prstGeom prst="ellipse">
+              <a:avLst/>
+            </a:prstGeom>
+          </p:spPr>
+          <p:style>
+            <a:lnRef idx="2">
+              <a:schemeClr val="dk1">
+                <a:shade val="15000"/>
+              </a:schemeClr>
+            </a:lnRef>
+            <a:fillRef idx="1">
+              <a:schemeClr val="dk1"/>
+            </a:fillRef>
+            <a:effectRef idx="0">
+              <a:schemeClr val="dk1"/>
+            </a:effectRef>
+            <a:fontRef idx="minor">
+              <a:schemeClr val="lt1"/>
+            </a:fontRef>
+          </p:style>
+          <p:txBody>
+            <a:bodyPr rtlCol="0" anchor="ctr"/>
+            <a:lstStyle/>
+            <a:p>
+              <a:pPr algn="ctr"/>
+              <a:endParaRPr lang="en-US" u="sng" dirty="0"/>
+            </a:p>
+          </p:txBody>
+        </p:sp>
+        <p:sp>
+          <p:nvSpPr>
+            <p:cNvPr id="98" name="Oval 97">
+              <a:extLst>
+                <a:ext uri="{FF2B5EF4-FFF2-40B4-BE49-F238E27FC236}">
+                  <a16:creationId xmlns:a16="http://schemas.microsoft.com/office/drawing/2014/main" id="{ECF91718-E12F-60F3-53B1-E9A689384A48}"/>
+                </a:ext>
+              </a:extLst>
+            </p:cNvPr>
+            <p:cNvSpPr/>
+            <p:nvPr/>
+          </p:nvSpPr>
+          <p:spPr>
+            <a:xfrm>
+              <a:off x="10215011" y="5618909"/>
+              <a:ext cx="79402" cy="94968"/>
+            </a:xfrm>
+            <a:prstGeom prst="ellipse">
+              <a:avLst/>
+            </a:prstGeom>
+          </p:spPr>
+          <p:style>
+            <a:lnRef idx="2">
+              <a:schemeClr val="dk1">
+                <a:shade val="15000"/>
+              </a:schemeClr>
+            </a:lnRef>
+            <a:fillRef idx="1">
+              <a:schemeClr val="dk1"/>
+            </a:fillRef>
+            <a:effectRef idx="0">
+              <a:schemeClr val="dk1"/>
+            </a:effectRef>
+            <a:fontRef idx="minor">
+              <a:schemeClr val="lt1"/>
+            </a:fontRef>
+          </p:style>
+          <p:txBody>
+            <a:bodyPr rtlCol="0" anchor="ctr"/>
+            <a:lstStyle/>
+            <a:p>
+              <a:pPr algn="ctr"/>
+              <a:endParaRPr lang="en-US" u="sng" dirty="0"/>
+            </a:p>
+          </p:txBody>
+        </p:sp>
+        <p:cxnSp>
+          <p:nvCxnSpPr>
+            <p:cNvPr id="101" name="Straight Connector 37">
+              <a:extLst>
+                <a:ext uri="{FF2B5EF4-FFF2-40B4-BE49-F238E27FC236}">
+                  <a16:creationId xmlns:a16="http://schemas.microsoft.com/office/drawing/2014/main" id="{9CA6EECA-24CE-464F-6148-839AA487639A}"/>
+                </a:ext>
+              </a:extLst>
+            </p:cNvPr>
+            <p:cNvCxnSpPr>
+              <a:cxnSpLocks/>
+              <a:stCxn id="51" idx="2"/>
+              <a:endCxn id="79" idx="1"/>
+            </p:cNvCxnSpPr>
+            <p:nvPr/>
+          </p:nvCxnSpPr>
+          <p:spPr>
+            <a:xfrm rot="10800000" flipH="1" flipV="1">
+              <a:off x="7963952" y="5607597"/>
+              <a:ext cx="1177612" cy="13275"/>
+            </a:xfrm>
+            <a:prstGeom prst="bentConnector4">
+              <a:avLst>
+                <a:gd name="adj1" fmla="val 2725"/>
+                <a:gd name="adj2" fmla="val 1023638"/>
+              </a:avLst>
+            </a:prstGeom>
+            <a:ln w="38100">
+              <a:solidFill>
+                <a:schemeClr val="tx1"/>
+              </a:solidFill>
+            </a:ln>
+          </p:spPr>
+          <p:style>
+            <a:lnRef idx="1">
+              <a:schemeClr val="dk1"/>
+            </a:lnRef>
+            <a:fillRef idx="0">
+              <a:schemeClr val="dk1"/>
+            </a:fillRef>
+            <a:effectRef idx="0">
+              <a:schemeClr val="dk1"/>
+            </a:effectRef>
+            <a:fontRef idx="minor">
+              <a:schemeClr val="tx1"/>
+            </a:fontRef>
+          </p:style>
+        </p:cxnSp>
+        <p:sp>
+          <p:nvSpPr>
+            <p:cNvPr id="59" name="Oval 58">
+              <a:extLst>
+                <a:ext uri="{FF2B5EF4-FFF2-40B4-BE49-F238E27FC236}">
+                  <a16:creationId xmlns:a16="http://schemas.microsoft.com/office/drawing/2014/main" id="{F3FA79C2-F2DE-CA0A-F18B-D38BFA67E758}"/>
+                </a:ext>
+              </a:extLst>
+            </p:cNvPr>
+            <p:cNvSpPr/>
+            <p:nvPr/>
+          </p:nvSpPr>
+          <p:spPr>
+            <a:xfrm>
+              <a:off x="8000043" y="2735026"/>
+              <a:ext cx="79402" cy="94968"/>
+            </a:xfrm>
+            <a:prstGeom prst="ellipse">
+              <a:avLst/>
+            </a:prstGeom>
+          </p:spPr>
+          <p:style>
+            <a:lnRef idx="2">
+              <a:schemeClr val="dk1">
+                <a:shade val="15000"/>
+              </a:schemeClr>
+            </a:lnRef>
+            <a:fillRef idx="1">
+              <a:schemeClr val="dk1"/>
+            </a:fillRef>
+            <a:effectRef idx="0">
+              <a:schemeClr val="dk1"/>
+            </a:effectRef>
+            <a:fontRef idx="minor">
+              <a:schemeClr val="lt1"/>
+            </a:fontRef>
+          </p:style>
+          <p:txBody>
+            <a:bodyPr rtlCol="0" anchor="ctr"/>
+            <a:lstStyle/>
+            <a:p>
+              <a:pPr algn="ctr"/>
+              <a:endParaRPr lang="en-US" u="sng" dirty="0"/>
+            </a:p>
+          </p:txBody>
+        </p:sp>
+        <p:sp>
+          <p:nvSpPr>
+            <p:cNvPr id="41" name="Oval 40">
+              <a:extLst>
+                <a:ext uri="{FF2B5EF4-FFF2-40B4-BE49-F238E27FC236}">
+                  <a16:creationId xmlns:a16="http://schemas.microsoft.com/office/drawing/2014/main" id="{9F1E6AAB-0CFE-E944-E819-87AEBC50E039}"/>
+                </a:ext>
+              </a:extLst>
+            </p:cNvPr>
+            <p:cNvSpPr/>
+            <p:nvPr/>
+          </p:nvSpPr>
+          <p:spPr>
+            <a:xfrm>
+              <a:off x="8046453" y="3474265"/>
+              <a:ext cx="79402" cy="94968"/>
+            </a:xfrm>
+            <a:prstGeom prst="ellipse">
+              <a:avLst/>
+            </a:prstGeom>
+          </p:spPr>
+          <p:style>
+            <a:lnRef idx="2">
+              <a:schemeClr val="dk1">
+                <a:shade val="15000"/>
+              </a:schemeClr>
+            </a:lnRef>
+            <a:fillRef idx="1">
+              <a:schemeClr val="dk1"/>
+            </a:fillRef>
+            <a:effectRef idx="0">
+              <a:schemeClr val="dk1"/>
+            </a:effectRef>
+            <a:fontRef idx="minor">
+              <a:schemeClr val="lt1"/>
+            </a:fontRef>
+          </p:style>
+          <p:txBody>
+            <a:bodyPr rtlCol="0" anchor="ctr"/>
+            <a:lstStyle/>
+            <a:p>
+              <a:pPr algn="ctr"/>
+              <a:endParaRPr lang="en-US" u="sng"/>
+            </a:p>
+          </p:txBody>
+        </p:sp>
+        <p:sp>
+          <p:nvSpPr>
+            <p:cNvPr id="43" name="Oval 42">
+              <a:extLst>
+                <a:ext uri="{FF2B5EF4-FFF2-40B4-BE49-F238E27FC236}">
+                  <a16:creationId xmlns:a16="http://schemas.microsoft.com/office/drawing/2014/main" id="{EEC6F30C-5D88-922D-865D-8A564C527278}"/>
+                </a:ext>
+              </a:extLst>
+            </p:cNvPr>
+            <p:cNvSpPr/>
+            <p:nvPr/>
+          </p:nvSpPr>
+          <p:spPr>
+            <a:xfrm>
+              <a:off x="7973799" y="4940208"/>
+              <a:ext cx="79402" cy="94968"/>
+            </a:xfrm>
+            <a:prstGeom prst="ellipse">
+              <a:avLst/>
+            </a:prstGeom>
+          </p:spPr>
+          <p:style>
+            <a:lnRef idx="2">
+              <a:schemeClr val="dk1">
+                <a:shade val="15000"/>
+              </a:schemeClr>
+            </a:lnRef>
+            <a:fillRef idx="1">
+              <a:schemeClr val="dk1"/>
+            </a:fillRef>
+            <a:effectRef idx="0">
+              <a:schemeClr val="dk1"/>
+            </a:effectRef>
+            <a:fontRef idx="minor">
+              <a:schemeClr val="lt1"/>
+            </a:fontRef>
+          </p:style>
+          <p:txBody>
+            <a:bodyPr rtlCol="0" anchor="ctr"/>
+            <a:lstStyle/>
+            <a:p>
+              <a:pPr algn="ctr"/>
+              <a:endParaRPr lang="en-US" u="sng"/>
+            </a:p>
+          </p:txBody>
+        </p:sp>
+      </p:grpSp>
+      <p:sp>
+        <p:nvSpPr>
+          <p:cNvPr id="60" name="TextBox 59">
+            <a:extLst>
+              <a:ext uri="{FF2B5EF4-FFF2-40B4-BE49-F238E27FC236}">
+                <a16:creationId xmlns:a16="http://schemas.microsoft.com/office/drawing/2014/main" id="{31A9C4C7-E3F6-68E0-A46C-24D8CE56AF04}"/>
+              </a:ext>
+            </a:extLst>
+          </p:cNvPr>
+          <p:cNvSpPr txBox="1"/>
+          <p:nvPr/>
+        </p:nvSpPr>
+        <p:spPr>
+          <a:xfrm>
+            <a:off x="7379692" y="1717696"/>
+            <a:ext cx="530915" cy="276999"/>
+          </a:xfrm>
+          <a:prstGeom prst="rect">
+            <a:avLst/>
+          </a:prstGeom>
+          <a:noFill/>
+        </p:spPr>
+        <p:txBody>
+          <a:bodyPr wrap="none" rtlCol="0">
+            <a:spAutoFit/>
+          </a:bodyPr>
+          <a:lstStyle/>
+          <a:p>
+            <a:r>
+              <a:rPr lang="en-US" sz="1200" dirty="0">
+                <a:solidFill>
+                  <a:srgbClr val="2985FD"/>
+                </a:solidFill>
+                <a:latin typeface="Berlin Sans FB" panose="020E0602020502020306" pitchFamily="34" charset="0"/>
+              </a:rPr>
+              <a:t>E B C</a:t>
+            </a:r>
+          </a:p>
+        </p:txBody>
+      </p:sp>
+      <p:sp>
+        <p:nvSpPr>
+          <p:cNvPr id="12" name="TextBox 11">
+            <a:extLst>
+              <a:ext uri="{FF2B5EF4-FFF2-40B4-BE49-F238E27FC236}">
+                <a16:creationId xmlns:a16="http://schemas.microsoft.com/office/drawing/2014/main" id="{691FCE1D-7BB9-73C3-FA4B-66F6DCBE92C0}"/>
+              </a:ext>
+            </a:extLst>
+          </p:cNvPr>
+          <p:cNvSpPr txBox="1"/>
+          <p:nvPr/>
+        </p:nvSpPr>
+        <p:spPr>
+          <a:xfrm>
+            <a:off x="10952558" y="23118"/>
+            <a:ext cx="1239442" cy="369332"/>
+          </a:xfrm>
+          <a:prstGeom prst="rect">
+            <a:avLst/>
+          </a:prstGeom>
+          <a:noFill/>
+        </p:spPr>
+        <p:txBody>
+          <a:bodyPr wrap="none" rtlCol="0">
+            <a:spAutoFit/>
+          </a:bodyPr>
+          <a:lstStyle/>
+          <a:p>
+            <a:r>
+              <a:rPr lang="en-US" dirty="0">
+                <a:latin typeface="Bahnschrift SemiBold" panose="020B0502040204020203" pitchFamily="34" charset="0"/>
+              </a:rPr>
+              <a:t>Buda Tech</a:t>
+            </a:r>
+          </a:p>
+        </p:txBody>
+      </p:sp>
+      <p:sp>
+        <p:nvSpPr>
+          <p:cNvPr id="16" name="TextBox 15">
+            <a:extLst>
+              <a:ext uri="{FF2B5EF4-FFF2-40B4-BE49-F238E27FC236}">
+                <a16:creationId xmlns:a16="http://schemas.microsoft.com/office/drawing/2014/main" id="{713A220F-DD4E-F651-8DDE-AC6A71796320}"/>
+              </a:ext>
+            </a:extLst>
+          </p:cNvPr>
+          <p:cNvSpPr txBox="1"/>
+          <p:nvPr/>
+        </p:nvSpPr>
+        <p:spPr>
+          <a:xfrm>
+            <a:off x="3668831" y="1369496"/>
+            <a:ext cx="1156086" cy="307777"/>
+          </a:xfrm>
+          <a:prstGeom prst="rect">
+            <a:avLst/>
+          </a:prstGeom>
+          <a:noFill/>
+        </p:spPr>
+        <p:txBody>
+          <a:bodyPr wrap="none" rtlCol="0">
+            <a:spAutoFit/>
+          </a:bodyPr>
+          <a:lstStyle/>
+          <a:p>
+            <a:r>
+              <a:rPr lang="en-US" sz="1400" dirty="0">
+                <a:solidFill>
+                  <a:srgbClr val="2985FD"/>
+                </a:solidFill>
+                <a:latin typeface="Berlin Sans FB Demi" panose="020E0802020502020306" pitchFamily="34" charset="0"/>
+              </a:rPr>
+              <a:t>S1               S2</a:t>
+            </a:r>
+          </a:p>
+        </p:txBody>
+      </p:sp>
+      <p:sp>
+        <p:nvSpPr>
+          <p:cNvPr id="17" name="TextBox 16">
+            <a:extLst>
+              <a:ext uri="{FF2B5EF4-FFF2-40B4-BE49-F238E27FC236}">
+                <a16:creationId xmlns:a16="http://schemas.microsoft.com/office/drawing/2014/main" id="{B87E59B8-3751-EB36-08C6-C7001A8387EF}"/>
+              </a:ext>
+            </a:extLst>
+          </p:cNvPr>
+          <p:cNvSpPr txBox="1"/>
+          <p:nvPr/>
+        </p:nvSpPr>
+        <p:spPr>
+          <a:xfrm>
+            <a:off x="7198459" y="3647714"/>
+            <a:ext cx="530915" cy="276999"/>
+          </a:xfrm>
+          <a:prstGeom prst="rect">
+            <a:avLst/>
+          </a:prstGeom>
+          <a:noFill/>
+        </p:spPr>
+        <p:txBody>
+          <a:bodyPr wrap="none" rtlCol="0">
+            <a:spAutoFit/>
+          </a:bodyPr>
+          <a:lstStyle/>
+          <a:p>
+            <a:r>
+              <a:rPr lang="en-US" sz="1200" dirty="0">
+                <a:solidFill>
+                  <a:srgbClr val="2985FD"/>
+                </a:solidFill>
+                <a:latin typeface="Berlin Sans FB" panose="020E0602020502020306" pitchFamily="34" charset="0"/>
+              </a:rPr>
+              <a:t>E B C</a:t>
+            </a:r>
+          </a:p>
+        </p:txBody>
+      </p:sp>
+      <p:sp>
+        <p:nvSpPr>
+          <p:cNvPr id="23" name="TextBox 22">
+            <a:extLst>
+              <a:ext uri="{FF2B5EF4-FFF2-40B4-BE49-F238E27FC236}">
+                <a16:creationId xmlns:a16="http://schemas.microsoft.com/office/drawing/2014/main" id="{F5ECD4CD-AB35-08E9-230F-3BD522B8BE7B}"/>
+              </a:ext>
+            </a:extLst>
+          </p:cNvPr>
+          <p:cNvSpPr txBox="1"/>
+          <p:nvPr/>
+        </p:nvSpPr>
+        <p:spPr>
+          <a:xfrm>
+            <a:off x="8527880" y="5211381"/>
+            <a:ext cx="354584" cy="338554"/>
+          </a:xfrm>
+          <a:prstGeom prst="rect">
+            <a:avLst/>
+          </a:prstGeom>
+          <a:noFill/>
+        </p:spPr>
+        <p:txBody>
+          <a:bodyPr wrap="none" rtlCol="0">
+            <a:spAutoFit/>
+          </a:bodyPr>
+          <a:lstStyle/>
+          <a:p>
+            <a:r>
+              <a:rPr lang="en-US" sz="1600" dirty="0">
+                <a:solidFill>
+                  <a:srgbClr val="2985FD"/>
+                </a:solidFill>
+                <a:latin typeface="Berlin Sans FB" panose="020E0602020502020306" pitchFamily="34" charset="0"/>
+              </a:rPr>
+              <a:t>1k</a:t>
+            </a:r>
+          </a:p>
+        </p:txBody>
+      </p:sp>
+      <p:sp>
+        <p:nvSpPr>
+          <p:cNvPr id="27" name="TextBox 26">
+            <a:extLst>
+              <a:ext uri="{FF2B5EF4-FFF2-40B4-BE49-F238E27FC236}">
+                <a16:creationId xmlns:a16="http://schemas.microsoft.com/office/drawing/2014/main" id="{2F3127EA-1AA0-E3C3-A2F8-2A65849772FF}"/>
+              </a:ext>
+            </a:extLst>
+          </p:cNvPr>
+          <p:cNvSpPr txBox="1"/>
+          <p:nvPr/>
+        </p:nvSpPr>
+        <p:spPr>
+          <a:xfrm>
+            <a:off x="3037125" y="3160812"/>
+            <a:ext cx="354584" cy="338554"/>
+          </a:xfrm>
+          <a:prstGeom prst="rect">
+            <a:avLst/>
+          </a:prstGeom>
+          <a:noFill/>
+        </p:spPr>
+        <p:txBody>
+          <a:bodyPr wrap="none" rtlCol="0">
+            <a:spAutoFit/>
+          </a:bodyPr>
+          <a:lstStyle/>
+          <a:p>
+            <a:r>
+              <a:rPr lang="en-US" sz="1600" dirty="0">
+                <a:solidFill>
+                  <a:srgbClr val="2985FD"/>
+                </a:solidFill>
+                <a:latin typeface="Berlin Sans FB" panose="020E0602020502020306" pitchFamily="34" charset="0"/>
+              </a:rPr>
+              <a:t>1k</a:t>
+            </a:r>
+          </a:p>
+        </p:txBody>
+      </p:sp>
+      <p:sp>
+        <p:nvSpPr>
+          <p:cNvPr id="32" name="TextBox 31">
+            <a:extLst>
+              <a:ext uri="{FF2B5EF4-FFF2-40B4-BE49-F238E27FC236}">
+                <a16:creationId xmlns:a16="http://schemas.microsoft.com/office/drawing/2014/main" id="{DF760D8D-78F5-5345-7FE3-95A16BBB9B73}"/>
+              </a:ext>
+            </a:extLst>
+          </p:cNvPr>
+          <p:cNvSpPr txBox="1"/>
+          <p:nvPr/>
+        </p:nvSpPr>
+        <p:spPr>
+          <a:xfrm>
+            <a:off x="4136970" y="3157570"/>
+            <a:ext cx="354584" cy="338554"/>
+          </a:xfrm>
+          <a:prstGeom prst="rect">
+            <a:avLst/>
+          </a:prstGeom>
+          <a:noFill/>
+        </p:spPr>
+        <p:txBody>
+          <a:bodyPr wrap="none" rtlCol="0">
+            <a:spAutoFit/>
+          </a:bodyPr>
+          <a:lstStyle/>
+          <a:p>
+            <a:r>
+              <a:rPr lang="en-US" sz="1600" dirty="0">
+                <a:solidFill>
+                  <a:srgbClr val="2985FD"/>
+                </a:solidFill>
+                <a:latin typeface="Berlin Sans FB" panose="020E0602020502020306" pitchFamily="34" charset="0"/>
+              </a:rPr>
+              <a:t>1k</a:t>
+            </a:r>
+          </a:p>
+        </p:txBody>
+      </p:sp>
+      <p:sp>
+        <p:nvSpPr>
+          <p:cNvPr id="35" name="TextBox 34">
+            <a:extLst>
+              <a:ext uri="{FF2B5EF4-FFF2-40B4-BE49-F238E27FC236}">
+                <a16:creationId xmlns:a16="http://schemas.microsoft.com/office/drawing/2014/main" id="{C2CE2E93-EF14-3A3D-6EF9-DAFD5BD36789}"/>
+              </a:ext>
+            </a:extLst>
+          </p:cNvPr>
+          <p:cNvSpPr txBox="1"/>
+          <p:nvPr/>
+        </p:nvSpPr>
+        <p:spPr>
+          <a:xfrm>
+            <a:off x="-36163" y="4927728"/>
+            <a:ext cx="8846332" cy="2123658"/>
+          </a:xfrm>
+          <a:prstGeom prst="rect">
+            <a:avLst/>
+          </a:prstGeom>
+          <a:noFill/>
+        </p:spPr>
+        <p:txBody>
+          <a:bodyPr wrap="none" rtlCol="0">
+            <a:spAutoFit/>
+          </a:bodyPr>
+          <a:lstStyle/>
+          <a:p>
+            <a:r>
+              <a:rPr lang="en-US" sz="6600" b="1" dirty="0">
+                <a:solidFill>
+                  <a:srgbClr val="FF0000"/>
+                </a:solidFill>
+                <a:latin typeface="Segoe UI" panose="020B0502040204020203" pitchFamily="34" charset="0"/>
+                <a:cs typeface="Segoe UI" panose="020B0502040204020203" pitchFamily="34" charset="0"/>
+              </a:rPr>
+              <a:t>AND GATE TTL </a:t>
+            </a:r>
+            <a:r>
+              <a:rPr lang="en-US" sz="6600" b="1" dirty="0">
+                <a:solidFill>
+                  <a:srgbClr val="00B0F0"/>
+                </a:solidFill>
+                <a:latin typeface="Segoe UI" panose="020B0502040204020203" pitchFamily="34" charset="0"/>
+                <a:cs typeface="Segoe UI" panose="020B0502040204020203" pitchFamily="34" charset="0"/>
+              </a:rPr>
+              <a:t>USING</a:t>
+            </a:r>
+          </a:p>
+          <a:p>
+            <a:r>
+              <a:rPr lang="en-US" sz="6600" b="1" dirty="0">
+                <a:latin typeface="Segoe UI" panose="020B0502040204020203" pitchFamily="34" charset="0"/>
+                <a:cs typeface="Segoe UI" panose="020B0502040204020203" pitchFamily="34" charset="0"/>
+              </a:rPr>
+              <a:t>BC547</a:t>
+            </a:r>
+            <a:r>
+              <a:rPr lang="en-US" sz="6600" b="1" dirty="0">
+                <a:solidFill>
+                  <a:srgbClr val="00B0F0"/>
+                </a:solidFill>
+                <a:latin typeface="Segoe UI" panose="020B0502040204020203" pitchFamily="34" charset="0"/>
+                <a:cs typeface="Segoe UI" panose="020B0502040204020203" pitchFamily="34" charset="0"/>
+              </a:rPr>
+              <a:t> TRANSISTORS </a:t>
+            </a:r>
+          </a:p>
+        </p:txBody>
+      </p:sp>
+      <mc:AlternateContent xmlns:mc="http://schemas.openxmlformats.org/markup-compatibility/2006" xmlns:a14="http://schemas.microsoft.com/office/drawing/2010/main">
+        <mc:Choice Requires="a14">
+          <p:sp>
+            <p:nvSpPr>
+              <p:cNvPr id="4" name="TextBox 3">
+                <a:extLst>
+                  <a:ext uri="{FF2B5EF4-FFF2-40B4-BE49-F238E27FC236}">
+                    <a16:creationId xmlns:a16="http://schemas.microsoft.com/office/drawing/2014/main" id="{F3348344-4A9F-AAC0-CD63-2792A809F839}"/>
+                  </a:ext>
+                </a:extLst>
+              </p:cNvPr>
+              <p:cNvSpPr txBox="1"/>
+              <p:nvPr/>
+            </p:nvSpPr>
+            <p:spPr>
+              <a:xfrm>
+                <a:off x="9115008" y="4555555"/>
+                <a:ext cx="668581" cy="369332"/>
+              </a:xfrm>
+              <a:prstGeom prst="rect">
+                <a:avLst/>
+              </a:prstGeom>
+              <a:noFill/>
+            </p:spPr>
+            <p:txBody>
+              <a:bodyPr wrap="none" rtlCol="0">
+                <a:spAutoFit/>
+              </a:bodyPr>
+              <a:lstStyle/>
+              <a:p>
+                <a:r>
+                  <a:rPr lang="en-US" sz="1600" dirty="0">
+                    <a:solidFill>
+                      <a:srgbClr val="0070C0"/>
+                    </a:solidFill>
+                    <a:latin typeface="Berlin Sans FB" panose="020E0602020502020306" pitchFamily="34" charset="0"/>
+                  </a:rPr>
+                  <a:t>220</a:t>
+                </a:r>
+                <a14:m>
+                  <m:oMath xmlns:m="http://schemas.openxmlformats.org/officeDocument/2006/math">
+                    <m:r>
+                      <a:rPr lang="en-US" sz="1800" i="1" smtClean="0">
+                        <a:solidFill>
+                          <a:srgbClr val="0070C0"/>
+                        </a:solidFill>
+                        <a:effectLst/>
+                        <a:latin typeface="Cambria Math" panose="02040503050406030204" pitchFamily="18" charset="0"/>
+                        <a:ea typeface="Calibri" panose="020F0502020204030204" pitchFamily="34" charset="0"/>
+                        <a:cs typeface="Times New Roman" panose="02020603050405020304" pitchFamily="18" charset="0"/>
+                      </a:rPr>
+                      <m:t>𝛺</m:t>
+                    </m:r>
+                  </m:oMath>
+                </a14:m>
+                <a:endParaRPr lang="en-US" sz="1600" dirty="0">
+                  <a:solidFill>
+                    <a:srgbClr val="0070C0"/>
+                  </a:solidFill>
+                  <a:latin typeface="Berlin Sans FB" panose="020E0602020502020306" pitchFamily="34" charset="0"/>
+                </a:endParaRPr>
+              </a:p>
+            </p:txBody>
+          </p:sp>
+        </mc:Choice>
+        <mc:Fallback xmlns="">
+          <p:sp>
+            <p:nvSpPr>
+              <p:cNvPr id="4" name="TextBox 3">
+                <a:extLst>
+                  <a:ext uri="{FF2B5EF4-FFF2-40B4-BE49-F238E27FC236}">
+                    <a16:creationId xmlns:a16="http://schemas.microsoft.com/office/drawing/2014/main" id="{F3348344-4A9F-AAC0-CD63-2792A809F839}"/>
+                  </a:ext>
+                </a:extLst>
+              </p:cNvPr>
+              <p:cNvSpPr txBox="1">
+                <a:spLocks noRot="1" noChangeAspect="1" noMove="1" noResize="1" noEditPoints="1" noAdjustHandles="1" noChangeArrowheads="1" noChangeShapeType="1" noTextEdit="1"/>
+              </p:cNvSpPr>
+              <p:nvPr/>
+            </p:nvSpPr>
+            <p:spPr>
+              <a:xfrm>
+                <a:off x="9115008" y="4555555"/>
+                <a:ext cx="668581" cy="369332"/>
+              </a:xfrm>
+              <a:prstGeom prst="rect">
+                <a:avLst/>
+              </a:prstGeom>
+              <a:blipFill>
+                <a:blip r:embed="rId8"/>
+                <a:stretch>
+                  <a:fillRect l="-4545" b="-19672"/>
+                </a:stretch>
+              </a:blipFill>
+            </p:spPr>
+            <p:txBody>
+              <a:bodyPr/>
+              <a:lstStyle/>
+              <a:p>
+                <a:r>
+                  <a:rPr lang="en-US">
+                    <a:noFill/>
+                  </a:rPr>
+                  <a:t> </a:t>
+                </a:r>
+              </a:p>
+            </p:txBody>
+          </p:sp>
+        </mc:Fallback>
+      </mc:AlternateContent>
+      <p:sp>
+        <p:nvSpPr>
+          <p:cNvPr id="19" name="TextBox 18">
+            <a:extLst>
+              <a:ext uri="{FF2B5EF4-FFF2-40B4-BE49-F238E27FC236}">
+                <a16:creationId xmlns:a16="http://schemas.microsoft.com/office/drawing/2014/main" id="{2C3DB9BB-8BBC-8F00-5315-8935113CB354}"/>
+              </a:ext>
+            </a:extLst>
+          </p:cNvPr>
+          <p:cNvSpPr txBox="1"/>
+          <p:nvPr/>
+        </p:nvSpPr>
+        <p:spPr>
+          <a:xfrm>
+            <a:off x="5153119" y="192972"/>
+            <a:ext cx="1750800" cy="369332"/>
+          </a:xfrm>
+          <a:prstGeom prst="rect">
+            <a:avLst/>
+          </a:prstGeom>
+          <a:noFill/>
+        </p:spPr>
+        <p:txBody>
+          <a:bodyPr wrap="none" rtlCol="0">
+            <a:spAutoFit/>
+          </a:bodyPr>
+          <a:lstStyle/>
+          <a:p>
+            <a:r>
+              <a:rPr lang="en-US" dirty="0">
+                <a:latin typeface="Bahnschrift SemiBold" panose="020B0502040204020203" pitchFamily="34" charset="0"/>
+              </a:rPr>
+              <a:t>TTL AND GATE </a:t>
+            </a:r>
+          </a:p>
+        </p:txBody>
+      </p:sp>
+    </p:spTree>
+    <p:extLst>
+      <p:ext uri="{BB962C8B-B14F-4D97-AF65-F5344CB8AC3E}">
+        <p14:creationId xmlns:p14="http://schemas.microsoft.com/office/powerpoint/2010/main" val="266126183"/>
+      </p:ext>
+    </p:extLst>
+  </p:cSld>
+  <p:clrMapOvr>
+    <a:masterClrMapping/>
+  </p:clrMapOvr>
+  <p:transition spd="slow">
+    <p:strips dir="rd"/>
+  </p:transition>
 </p:sld>
 </file>
 
